--- a/ADG/_실측판/15장/15장_V뷰기반모니터링과문제해결.pptx
+++ b/ADG/_실측판/15장/15장_V뷰기반모니터링과문제해결.pptx
@@ -6183,7 +6183,44 @@
                 </a:solidFill>
                 <a:latin typeface="맑은 고딕"/>
               </a:rPr>
-              <a:t>•  boston `V$LOGFILE` — **14행** (그룹당 멤버 둘)</a:t>
+              <a:t>•  boston </a:t>
+            </a:r>
+            <a:r>
+              <a:rPr sz="1700" b="0">
+                <a:solidFill>
+                  <a:srgbClr val="222222"/>
+                </a:solidFill>
+                <a:latin typeface="Consolas"/>
+                <a:cs typeface="Consolas"/>
+              </a:rPr>
+              <a:t>V$LOGFILE</a:t>
+            </a:r>
+            <a:r>
+              <a:rPr sz="1700" b="0">
+                <a:solidFill>
+                  <a:srgbClr val="222222"/>
+                </a:solidFill>
+                <a:latin typeface="맑은 고딕"/>
+              </a:rPr>
+              <a:t> — </a:t>
+            </a:r>
+            <a:r>
+              <a:rPr sz="1700" b="1">
+                <a:solidFill>
+                  <a:srgbClr val="222222"/>
+                </a:solidFill>
+                <a:latin typeface="맑은 고딕"/>
+              </a:rPr>
+              <a:t>14행</a:t>
+            </a:r>
+            <a:r>
+              <a:rPr sz="1700" b="0">
+                <a:solidFill>
+                  <a:srgbClr val="222222"/>
+                </a:solidFill>
+                <a:latin typeface="맑은 고딕"/>
+              </a:rPr>
+              <a:t> (그룹당 멤버 둘)</a:t>
             </a:r>
           </a:p>
           <a:p>
@@ -6199,7 +6236,25 @@
                 </a:solidFill>
                 <a:latin typeface="맑은 고딕"/>
               </a:rPr>
-              <a:t>•  chicago — **7행** (그룹당 하나)</a:t>
+              <a:t>•  chicago — </a:t>
+            </a:r>
+            <a:r>
+              <a:rPr sz="1700" b="1">
+                <a:solidFill>
+                  <a:srgbClr val="222222"/>
+                </a:solidFill>
+                <a:latin typeface="맑은 고딕"/>
+              </a:rPr>
+              <a:t>7행</a:t>
+            </a:r>
+            <a:r>
+              <a:rPr sz="1700" b="0">
+                <a:solidFill>
+                  <a:srgbClr val="222222"/>
+                </a:solidFill>
+                <a:latin typeface="맑은 고딕"/>
+              </a:rPr>
+              <a:t> (그룹당 하나)</a:t>
             </a:r>
           </a:p>
           <a:p>
@@ -6215,7 +6270,45 @@
                 </a:solidFill>
                 <a:latin typeface="맑은 고딕"/>
               </a:rPr>
-              <a:t>•  6장에서 `DB_CREATE_ONLINE_LOG_DEST_1`·`_2` 를 지정한 결과</a:t>
+              <a:t>•  6장에서 </a:t>
+            </a:r>
+            <a:r>
+              <a:rPr sz="1700" b="0">
+                <a:solidFill>
+                  <a:srgbClr val="222222"/>
+                </a:solidFill>
+                <a:latin typeface="Consolas"/>
+                <a:cs typeface="Consolas"/>
+              </a:rPr>
+              <a:t>DB_CREATE_ONLINE_LOG_DEST_1</a:t>
+            </a:r>
+            <a:r>
+              <a:rPr sz="1700" b="0">
+                <a:solidFill>
+                  <a:srgbClr val="222222"/>
+                </a:solidFill>
+                <a:latin typeface="맑은 고딕"/>
+              </a:rPr>
+              <a:t>·</a:t>
+            </a:r>
+            <a:r>
+              <a:rPr sz="1700" b="0">
+                <a:solidFill>
+                  <a:srgbClr val="222222"/>
+                </a:solidFill>
+                <a:latin typeface="Consolas"/>
+                <a:cs typeface="Consolas"/>
+              </a:rPr>
+              <a:t>_2</a:t>
+            </a:r>
+            <a:r>
+              <a:rPr sz="1700" b="0">
+                <a:solidFill>
+                  <a:srgbClr val="222222"/>
+                </a:solidFill>
+                <a:latin typeface="맑은 고딕"/>
+              </a:rPr>
+              <a:t> 를 지정한 결과</a:t>
             </a:r>
           </a:p>
           <a:p>
@@ -6231,7 +6324,16 @@
                 </a:solidFill>
                 <a:latin typeface="맑은 고딕"/>
               </a:rPr>
-              <a:t>•  **역할이 바뀌면 다중화 수준도 바뀐다**</a:t>
+              <a:t>•  </a:t>
+            </a:r>
+            <a:r>
+              <a:rPr sz="1700" b="1">
+                <a:solidFill>
+                  <a:srgbClr val="222222"/>
+                </a:solidFill>
+                <a:latin typeface="맑은 고딕"/>
+              </a:rPr>
+              <a:t>역할이 바뀌면 다중화 수준도 바뀐다</a:t>
             </a:r>
           </a:p>
         </p:txBody>
@@ -6410,7 +6512,72 @@
                 </a:solidFill>
                 <a:latin typeface="맑은 고딕"/>
               </a:rPr>
-              <a:t>•  실측 — 그룹 4가 `ACTIVE`, 시퀀스 **74**, `USED` **8,977KB**</a:t>
+              <a:t>•  실측 — 그룹 4가 </a:t>
+            </a:r>
+            <a:r>
+              <a:rPr sz="1700" b="0">
+                <a:solidFill>
+                  <a:srgbClr val="222222"/>
+                </a:solidFill>
+                <a:latin typeface="Consolas"/>
+                <a:cs typeface="Consolas"/>
+              </a:rPr>
+              <a:t>ACTIVE</a:t>
+            </a:r>
+            <a:r>
+              <a:rPr sz="1700" b="0">
+                <a:solidFill>
+                  <a:srgbClr val="222222"/>
+                </a:solidFill>
+                <a:latin typeface="맑은 고딕"/>
+              </a:rPr>
+              <a:t>, 시퀀스 </a:t>
+            </a:r>
+            <a:r>
+              <a:rPr sz="1700" b="1">
+                <a:solidFill>
+                  <a:srgbClr val="222222"/>
+                </a:solidFill>
+                <a:latin typeface="맑은 고딕"/>
+              </a:rPr>
+              <a:t>74</a:t>
+            </a:r>
+            <a:r>
+              <a:rPr sz="1700" b="0">
+                <a:solidFill>
+                  <a:srgbClr val="222222"/>
+                </a:solidFill>
+                <a:latin typeface="맑은 고딕"/>
+              </a:rPr>
+              <a:t>, </a:t>
+            </a:r>
+            <a:r>
+              <a:rPr sz="1700" b="0">
+                <a:solidFill>
+                  <a:srgbClr val="222222"/>
+                </a:solidFill>
+                <a:latin typeface="Consolas"/>
+                <a:cs typeface="Consolas"/>
+              </a:rPr>
+              <a:t>USED</a:t>
+            </a:r>
+            <a:r>
+              <a:rPr sz="1700" b="0">
+                <a:solidFill>
+                  <a:srgbClr val="222222"/>
+                </a:solidFill>
+                <a:latin typeface="맑은 고딕"/>
+              </a:rPr>
+              <a:t> </a:t>
+            </a:r>
+            <a:r>
+              <a:rPr sz="1700" b="1">
+                <a:solidFill>
+                  <a:srgbClr val="222222"/>
+                </a:solidFill>
+                <a:latin typeface="맑은 고딕"/>
+              </a:rPr>
+              <a:t>8,977KB</a:t>
             </a:r>
           </a:p>
           <a:p>
@@ -6426,7 +6593,17 @@
                 </a:solidFill>
                 <a:latin typeface="맑은 고딕"/>
               </a:rPr>
-              <a:t>•  나머지 셋은 `UNASSIGNED`</a:t>
+              <a:t>•  나머지 셋은 </a:t>
+            </a:r>
+            <a:r>
+              <a:rPr sz="1700" b="0">
+                <a:solidFill>
+                  <a:srgbClr val="222222"/>
+                </a:solidFill>
+                <a:latin typeface="Consolas"/>
+                <a:cs typeface="Consolas"/>
+              </a:rPr>
+              <a:t>UNASSIGNED</a:t>
             </a:r>
           </a:p>
           <a:p>
@@ -6442,7 +6619,35 @@
                 </a:solidFill>
                 <a:latin typeface="맑은 고딕"/>
               </a:rPr>
-              <a:t>•  **`ACTIVE` 가 정확히 하나**여야 한다</a:t>
+              <a:t>•  </a:t>
+            </a:r>
+            <a:r>
+              <a:rPr sz="1700" b="1">
+                <a:solidFill>
+                  <a:srgbClr val="222222"/>
+                </a:solidFill>
+                <a:latin typeface="Consolas"/>
+                <a:cs typeface="Consolas"/>
+              </a:rPr>
+              <a:t>ACTIVE</a:t>
+            </a:r>
+            <a:r>
+              <a:rPr sz="1700" b="1">
+                <a:solidFill>
+                  <a:srgbClr val="222222"/>
+                </a:solidFill>
+                <a:latin typeface="맑은 고딕"/>
+              </a:rPr>
+              <a:t> 가 정확히 하나</a:t>
+            </a:r>
+            <a:r>
+              <a:rPr sz="1700" b="0">
+                <a:solidFill>
+                  <a:srgbClr val="222222"/>
+                </a:solidFill>
+                <a:latin typeface="맑은 고딕"/>
+              </a:rPr>
+              <a:t>여야 한다</a:t>
             </a:r>
           </a:p>
           <a:p>
@@ -6637,7 +6842,36 @@
                 </a:solidFill>
                 <a:latin typeface="맑은 고딕"/>
               </a:rPr>
-              <a:t>•  넷 다 `UNASSIGNED`, `SEQUENCE# 0`</a:t>
+              <a:t>•  넷 다 </a:t>
+            </a:r>
+            <a:r>
+              <a:rPr sz="1700" b="0">
+                <a:solidFill>
+                  <a:srgbClr val="222222"/>
+                </a:solidFill>
+                <a:latin typeface="Consolas"/>
+                <a:cs typeface="Consolas"/>
+              </a:rPr>
+              <a:t>UNASSIGNED</a:t>
+            </a:r>
+            <a:r>
+              <a:rPr sz="1700" b="0">
+                <a:solidFill>
+                  <a:srgbClr val="222222"/>
+                </a:solidFill>
+                <a:latin typeface="맑은 고딕"/>
+              </a:rPr>
+              <a:t>, </a:t>
+            </a:r>
+            <a:r>
+              <a:rPr sz="1700" b="0">
+                <a:solidFill>
+                  <a:srgbClr val="222222"/>
+                </a:solidFill>
+                <a:latin typeface="Consolas"/>
+                <a:cs typeface="Consolas"/>
+              </a:rPr>
+              <a:t>SEQUENCE# 0</a:t>
             </a:r>
           </a:p>
           <a:p>
@@ -6669,7 +6903,16 @@
                 </a:solidFill>
                 <a:latin typeface="맑은 고딕"/>
               </a:rPr>
-              <a:t>•  **뷰가 조회된다는 것과 값이 있다는 것은 다르다**</a:t>
+              <a:t>•  </a:t>
+            </a:r>
+            <a:r>
+              <a:rPr sz="1700" b="1">
+                <a:solidFill>
+                  <a:srgbClr val="222222"/>
+                </a:solidFill>
+                <a:latin typeface="맑은 고딕"/>
+              </a:rPr>
+              <a:t>뷰가 조회된다는 것과 값이 있다는 것은 다르다</a:t>
             </a:r>
           </a:p>
           <a:p>
@@ -6685,7 +6928,44 @@
                 </a:solidFill>
                 <a:latin typeface="맑은 고딕"/>
               </a:rPr>
-              <a:t>•  감시가 전부 `UNASSIGNED` 를 받았다면 **조회한 쪽**을 먼저 의심</a:t>
+              <a:t>•  감시가 전부 </a:t>
+            </a:r>
+            <a:r>
+              <a:rPr sz="1700" b="0">
+                <a:solidFill>
+                  <a:srgbClr val="222222"/>
+                </a:solidFill>
+                <a:latin typeface="Consolas"/>
+                <a:cs typeface="Consolas"/>
+              </a:rPr>
+              <a:t>UNASSIGNED</a:t>
+            </a:r>
+            <a:r>
+              <a:rPr sz="1700" b="0">
+                <a:solidFill>
+                  <a:srgbClr val="222222"/>
+                </a:solidFill>
+                <a:latin typeface="맑은 고딕"/>
+              </a:rPr>
+              <a:t> 를 받았다면 </a:t>
+            </a:r>
+            <a:r>
+              <a:rPr sz="1700" b="1">
+                <a:solidFill>
+                  <a:srgbClr val="222222"/>
+                </a:solidFill>
+                <a:latin typeface="맑은 고딕"/>
+              </a:rPr>
+              <a:t>조회한 쪽</a:t>
+            </a:r>
+            <a:r>
+              <a:rPr sz="1700" b="0">
+                <a:solidFill>
+                  <a:srgbClr val="222222"/>
+                </a:solidFill>
+                <a:latin typeface="맑은 고딕"/>
+              </a:rPr>
+              <a:t>을 먼저 의심</a:t>
             </a:r>
           </a:p>
         </p:txBody>
@@ -7119,7 +7399,44 @@
                 </a:solidFill>
                 <a:latin typeface="맑은 고딕"/>
               </a:rPr>
-              <a:t>•  `V$ARCHIVE_DEST` — **설정**이 어떻게 되어 있는가</a:t>
+              <a:t>•  </a:t>
+            </a:r>
+            <a:r>
+              <a:rPr sz="1700" b="0">
+                <a:solidFill>
+                  <a:srgbClr val="222222"/>
+                </a:solidFill>
+                <a:latin typeface="Consolas"/>
+                <a:cs typeface="Consolas"/>
+              </a:rPr>
+              <a:t>V$ARCHIVE_DEST</a:t>
+            </a:r>
+            <a:r>
+              <a:rPr sz="1700" b="0">
+                <a:solidFill>
+                  <a:srgbClr val="222222"/>
+                </a:solidFill>
+                <a:latin typeface="맑은 고딕"/>
+              </a:rPr>
+              <a:t> — </a:t>
+            </a:r>
+            <a:r>
+              <a:rPr sz="1700" b="1">
+                <a:solidFill>
+                  <a:srgbClr val="222222"/>
+                </a:solidFill>
+                <a:latin typeface="맑은 고딕"/>
+              </a:rPr>
+              <a:t>설정</a:t>
+            </a:r>
+            <a:r>
+              <a:rPr sz="1700" b="0">
+                <a:solidFill>
+                  <a:srgbClr val="222222"/>
+                </a:solidFill>
+                <a:latin typeface="맑은 고딕"/>
+              </a:rPr>
+              <a:t>이 어떻게 되어 있는가</a:t>
             </a:r>
           </a:p>
           <a:p>
@@ -7135,7 +7452,44 @@
                 </a:solidFill>
                 <a:latin typeface="맑은 고딕"/>
               </a:rPr>
-              <a:t>•  `V$ARCHIVE_DEST_STATUS` — **지금** 어떤 상태인가</a:t>
+              <a:t>•  </a:t>
+            </a:r>
+            <a:r>
+              <a:rPr sz="1700" b="0">
+                <a:solidFill>
+                  <a:srgbClr val="222222"/>
+                </a:solidFill>
+                <a:latin typeface="Consolas"/>
+                <a:cs typeface="Consolas"/>
+              </a:rPr>
+              <a:t>V$ARCHIVE_DEST_STATUS</a:t>
+            </a:r>
+            <a:r>
+              <a:rPr sz="1700" b="0">
+                <a:solidFill>
+                  <a:srgbClr val="222222"/>
+                </a:solidFill>
+                <a:latin typeface="맑은 고딕"/>
+              </a:rPr>
+              <a:t> — </a:t>
+            </a:r>
+            <a:r>
+              <a:rPr sz="1700" b="1">
+                <a:solidFill>
+                  <a:srgbClr val="222222"/>
+                </a:solidFill>
+                <a:latin typeface="맑은 고딕"/>
+              </a:rPr>
+              <a:t>지금</a:t>
+            </a:r>
+            <a:r>
+              <a:rPr sz="1700" b="0">
+                <a:solidFill>
+                  <a:srgbClr val="222222"/>
+                </a:solidFill>
+                <a:latin typeface="맑은 고딕"/>
+              </a:rPr>
+              <a:t> 어떤 상태인가</a:t>
             </a:r>
           </a:p>
           <a:p>
@@ -7151,7 +7505,36 @@
                 </a:solidFill>
                 <a:latin typeface="맑은 고딕"/>
               </a:rPr>
-              <a:t>•  구별법 — `RECOVERY_MODE` 가 있으면 `_STATUS`</a:t>
+              <a:t>•  구별법 — </a:t>
+            </a:r>
+            <a:r>
+              <a:rPr sz="1700" b="0">
+                <a:solidFill>
+                  <a:srgbClr val="222222"/>
+                </a:solidFill>
+                <a:latin typeface="Consolas"/>
+                <a:cs typeface="Consolas"/>
+              </a:rPr>
+              <a:t>RECOVERY_MODE</a:t>
+            </a:r>
+            <a:r>
+              <a:rPr sz="1700" b="0">
+                <a:solidFill>
+                  <a:srgbClr val="222222"/>
+                </a:solidFill>
+                <a:latin typeface="맑은 고딕"/>
+              </a:rPr>
+              <a:t> 가 있으면 </a:t>
+            </a:r>
+            <a:r>
+              <a:rPr sz="1700" b="0">
+                <a:solidFill>
+                  <a:srgbClr val="222222"/>
+                </a:solidFill>
+                <a:latin typeface="Consolas"/>
+                <a:cs typeface="Consolas"/>
+              </a:rPr>
+              <a:t>_STATUS</a:t>
             </a:r>
           </a:p>
           <a:p>
@@ -7167,7 +7550,54 @@
                 </a:solidFill>
                 <a:latin typeface="맑은 고딕"/>
               </a:rPr>
-              <a:t>•  실측 `dest_id=1` 의 `RECOVERY_MODE` = **IDLE**</a:t>
+              <a:t>•  실측 </a:t>
+            </a:r>
+            <a:r>
+              <a:rPr sz="1700" b="0">
+                <a:solidFill>
+                  <a:srgbClr val="222222"/>
+                </a:solidFill>
+                <a:latin typeface="Consolas"/>
+                <a:cs typeface="Consolas"/>
+              </a:rPr>
+              <a:t>dest_id=1</a:t>
+            </a:r>
+            <a:r>
+              <a:rPr sz="1700" b="0">
+                <a:solidFill>
+                  <a:srgbClr val="222222"/>
+                </a:solidFill>
+                <a:latin typeface="맑은 고딕"/>
+              </a:rPr>
+              <a:t> 의 </a:t>
+            </a:r>
+            <a:r>
+              <a:rPr sz="1700" b="0">
+                <a:solidFill>
+                  <a:srgbClr val="222222"/>
+                </a:solidFill>
+                <a:latin typeface="Consolas"/>
+                <a:cs typeface="Consolas"/>
+              </a:rPr>
+              <a:t>RECOVERY_MODE</a:t>
+            </a:r>
+            <a:r>
+              <a:rPr sz="1700" b="0">
+                <a:solidFill>
+                  <a:srgbClr val="222222"/>
+                </a:solidFill>
+                <a:latin typeface="맑은 고딕"/>
+              </a:rPr>
+              <a:t> = </a:t>
+            </a:r>
+            <a:r>
+              <a:rPr sz="1700" b="1">
+                <a:solidFill>
+                  <a:srgbClr val="222222"/>
+                </a:solidFill>
+                <a:latin typeface="맑은 고딕"/>
+              </a:rPr>
+              <a:t>IDLE</a:t>
             </a:r>
           </a:p>
         </p:txBody>
@@ -7346,7 +7776,64 @@
                 </a:solidFill>
                 <a:latin typeface="맑은 고딕"/>
               </a:rPr>
-              <a:t>•  `TARGET` — 1번 `PRIMARY`(로컬), 2번 `STANDBY`(원격)</a:t>
+              <a:t>•  </a:t>
+            </a:r>
+            <a:r>
+              <a:rPr sz="1700" b="0">
+                <a:solidFill>
+                  <a:srgbClr val="222222"/>
+                </a:solidFill>
+                <a:latin typeface="Consolas"/>
+                <a:cs typeface="Consolas"/>
+              </a:rPr>
+              <a:t>TARGET</a:t>
+            </a:r>
+            <a:r>
+              <a:rPr sz="1700" b="0">
+                <a:solidFill>
+                  <a:srgbClr val="222222"/>
+                </a:solidFill>
+                <a:latin typeface="맑은 고딕"/>
+              </a:rPr>
+              <a:t> — 1번 </a:t>
+            </a:r>
+            <a:r>
+              <a:rPr sz="1700" b="0">
+                <a:solidFill>
+                  <a:srgbClr val="222222"/>
+                </a:solidFill>
+                <a:latin typeface="Consolas"/>
+                <a:cs typeface="Consolas"/>
+              </a:rPr>
+              <a:t>PRIMARY</a:t>
+            </a:r>
+            <a:r>
+              <a:rPr sz="1700" b="0">
+                <a:solidFill>
+                  <a:srgbClr val="222222"/>
+                </a:solidFill>
+                <a:latin typeface="맑은 고딕"/>
+              </a:rPr>
+              <a:t>(로컬), 2번 </a:t>
+            </a:r>
+            <a:r>
+              <a:rPr sz="1700" b="0">
+                <a:solidFill>
+                  <a:srgbClr val="222222"/>
+                </a:solidFill>
+                <a:latin typeface="Consolas"/>
+                <a:cs typeface="Consolas"/>
+              </a:rPr>
+              <a:t>STANDBY</a:t>
+            </a:r>
+            <a:r>
+              <a:rPr sz="1700" b="0">
+                <a:solidFill>
+                  <a:srgbClr val="222222"/>
+                </a:solidFill>
+                <a:latin typeface="맑은 고딕"/>
+              </a:rPr>
+              <a:t>(원격)</a:t>
             </a:r>
           </a:p>
           <a:p>
@@ -7362,7 +7849,36 @@
                 </a:solidFill>
                 <a:latin typeface="맑은 고딕"/>
               </a:rPr>
-              <a:t>•  `VALID_TYPE` — 2번은 `ONLINE_LOGFILE`</a:t>
+              <a:t>•  </a:t>
+            </a:r>
+            <a:r>
+              <a:rPr sz="1700" b="0">
+                <a:solidFill>
+                  <a:srgbClr val="222222"/>
+                </a:solidFill>
+                <a:latin typeface="Consolas"/>
+                <a:cs typeface="Consolas"/>
+              </a:rPr>
+              <a:t>VALID_TYPE</a:t>
+            </a:r>
+            <a:r>
+              <a:rPr sz="1700" b="0">
+                <a:solidFill>
+                  <a:srgbClr val="222222"/>
+                </a:solidFill>
+                <a:latin typeface="맑은 고딕"/>
+              </a:rPr>
+              <a:t> — 2번은 </a:t>
+            </a:r>
+            <a:r>
+              <a:rPr sz="1700" b="0">
+                <a:solidFill>
+                  <a:srgbClr val="222222"/>
+                </a:solidFill>
+                <a:latin typeface="Consolas"/>
+                <a:cs typeface="Consolas"/>
+              </a:rPr>
+              <a:t>ONLINE_LOGFILE</a:t>
             </a:r>
           </a:p>
           <a:p>
@@ -7378,7 +7894,36 @@
                 </a:solidFill>
                 <a:latin typeface="맑은 고딕"/>
               </a:rPr>
-              <a:t>•  `VALID_ROLE` — 둘 다 `ALL_ROLES`</a:t>
+              <a:t>•  </a:t>
+            </a:r>
+            <a:r>
+              <a:rPr sz="1700" b="0">
+                <a:solidFill>
+                  <a:srgbClr val="222222"/>
+                </a:solidFill>
+                <a:latin typeface="Consolas"/>
+                <a:cs typeface="Consolas"/>
+              </a:rPr>
+              <a:t>VALID_ROLE</a:t>
+            </a:r>
+            <a:r>
+              <a:rPr sz="1700" b="0">
+                <a:solidFill>
+                  <a:srgbClr val="222222"/>
+                </a:solidFill>
+                <a:latin typeface="맑은 고딕"/>
+              </a:rPr>
+              <a:t> — 둘 다 </a:t>
+            </a:r>
+            <a:r>
+              <a:rPr sz="1700" b="0">
+                <a:solidFill>
+                  <a:srgbClr val="222222"/>
+                </a:solidFill>
+                <a:latin typeface="Consolas"/>
+                <a:cs typeface="Consolas"/>
+              </a:rPr>
+              <a:t>ALL_ROLES</a:t>
             </a:r>
           </a:p>
           <a:p>
@@ -7394,7 +7939,72 @@
                 </a:solidFill>
                 <a:latin typeface="맑은 고딕"/>
               </a:rPr>
-              <a:t>•  `AFFIRM` **NO** / 1번 `TRANSMIT_MODE` **SYNCHRONOUS**</a:t>
+              <a:t>•  </a:t>
+            </a:r>
+            <a:r>
+              <a:rPr sz="1700" b="0">
+                <a:solidFill>
+                  <a:srgbClr val="222222"/>
+                </a:solidFill>
+                <a:latin typeface="Consolas"/>
+                <a:cs typeface="Consolas"/>
+              </a:rPr>
+              <a:t>AFFIRM</a:t>
+            </a:r>
+            <a:r>
+              <a:rPr sz="1700" b="0">
+                <a:solidFill>
+                  <a:srgbClr val="222222"/>
+                </a:solidFill>
+                <a:latin typeface="맑은 고딕"/>
+              </a:rPr>
+              <a:t> </a:t>
+            </a:r>
+            <a:r>
+              <a:rPr sz="1700" b="1">
+                <a:solidFill>
+                  <a:srgbClr val="222222"/>
+                </a:solidFill>
+                <a:latin typeface="맑은 고딕"/>
+              </a:rPr>
+              <a:t>NO</a:t>
+            </a:r>
+            <a:r>
+              <a:rPr sz="1700" b="0">
+                <a:solidFill>
+                  <a:srgbClr val="222222"/>
+                </a:solidFill>
+                <a:latin typeface="맑은 고딕"/>
+              </a:rPr>
+              <a:t> / 1번 </a:t>
+            </a:r>
+            <a:r>
+              <a:rPr sz="1700" b="0">
+                <a:solidFill>
+                  <a:srgbClr val="222222"/>
+                </a:solidFill>
+                <a:latin typeface="Consolas"/>
+                <a:cs typeface="Consolas"/>
+              </a:rPr>
+              <a:t>TRANSMIT_MODE</a:t>
+            </a:r>
+            <a:r>
+              <a:rPr sz="1700" b="0">
+                <a:solidFill>
+                  <a:srgbClr val="222222"/>
+                </a:solidFill>
+                <a:latin typeface="맑은 고딕"/>
+              </a:rPr>
+              <a:t> </a:t>
+            </a:r>
+            <a:r>
+              <a:rPr sz="1700" b="1">
+                <a:solidFill>
+                  <a:srgbClr val="222222"/>
+                </a:solidFill>
+                <a:latin typeface="맑은 고딕"/>
+              </a:rPr>
+              <a:t>SYNCHRONOUS</a:t>
             </a:r>
           </a:p>
         </p:txBody>
@@ -7573,7 +8183,25 @@
                 </a:solidFill>
                 <a:latin typeface="맑은 고딕"/>
               </a:rPr>
-              <a:t>•  이 뷰는 목적지 **31개를 전부** 보여 준다</a:t>
+              <a:t>•  이 뷰는 목적지 </a:t>
+            </a:r>
+            <a:r>
+              <a:rPr sz="1700" b="1">
+                <a:solidFill>
+                  <a:srgbClr val="222222"/>
+                </a:solidFill>
+                <a:latin typeface="맑은 고딕"/>
+              </a:rPr>
+              <a:t>31개를 전부</a:t>
+            </a:r>
+            <a:r>
+              <a:rPr sz="1700" b="0">
+                <a:solidFill>
+                  <a:srgbClr val="222222"/>
+                </a:solidFill>
+                <a:latin typeface="맑은 고딕"/>
+              </a:rPr>
+              <a:t> 보여 준다</a:t>
             </a:r>
           </a:p>
           <a:p>
@@ -7589,7 +8217,17 @@
                 </a:solidFill>
                 <a:latin typeface="맑은 고딕"/>
               </a:rPr>
-              <a:t>•  쓰지 않는 목적지는 설정이 비어 `UNKNOWN`</a:t>
+              <a:t>•  쓰지 않는 목적지는 설정이 비어 </a:t>
+            </a:r>
+            <a:r>
+              <a:rPr sz="1700" b="0">
+                <a:solidFill>
+                  <a:srgbClr val="222222"/>
+                </a:solidFill>
+                <a:latin typeface="Consolas"/>
+                <a:cs typeface="Consolas"/>
+              </a:rPr>
+              <a:t>UNKNOWN</a:t>
             </a:r>
           </a:p>
           <a:p>
@@ -7605,7 +8243,26 @@
                 </a:solidFill>
                 <a:latin typeface="맑은 고딕"/>
               </a:rPr>
-              <a:t>•  10장 Far Sync 설정 직후에도 `UNKNOWN` 이었다</a:t>
+              <a:t>•  10장 Far Sync 설정 직후에도 </a:t>
+            </a:r>
+            <a:r>
+              <a:rPr sz="1700" b="0">
+                <a:solidFill>
+                  <a:srgbClr val="222222"/>
+                </a:solidFill>
+                <a:latin typeface="Consolas"/>
+                <a:cs typeface="Consolas"/>
+              </a:rPr>
+              <a:t>UNKNOWN</a:t>
+            </a:r>
+            <a:r>
+              <a:rPr sz="1700" b="0">
+                <a:solidFill>
+                  <a:srgbClr val="222222"/>
+                </a:solidFill>
+                <a:latin typeface="맑은 고딕"/>
+              </a:rPr>
+              <a:t> 이었다</a:t>
             </a:r>
           </a:p>
           <a:p>
@@ -7621,7 +8278,26 @@
                 </a:solidFill>
                 <a:latin typeface="맑은 고딕"/>
               </a:rPr>
-              <a:t>•  **`DESTINATION` 이 비었는지 먼저 확인한다**</a:t>
+              <a:t>•  </a:t>
+            </a:r>
+            <a:r>
+              <a:rPr sz="1700" b="1">
+                <a:solidFill>
+                  <a:srgbClr val="222222"/>
+                </a:solidFill>
+                <a:latin typeface="Consolas"/>
+                <a:cs typeface="Consolas"/>
+              </a:rPr>
+              <a:t>DESTINATION</a:t>
+            </a:r>
+            <a:r>
+              <a:rPr sz="1700" b="1">
+                <a:solidFill>
+                  <a:srgbClr val="222222"/>
+                </a:solidFill>
+                <a:latin typeface="맑은 고딕"/>
+              </a:rPr>
+              <a:t> 이 비었는지 먼저 확인한다</a:t>
             </a:r>
           </a:p>
         </p:txBody>
@@ -7800,7 +8476,53 @@
                 </a:solidFill>
                 <a:latin typeface="맑은 고딕"/>
               </a:rPr>
-              <a:t>•  `RFS`(LGWR) 시퀀스 **74** 블록 **17964**</a:t>
+              <a:t>•  </a:t>
+            </a:r>
+            <a:r>
+              <a:rPr sz="1700" b="0">
+                <a:solidFill>
+                  <a:srgbClr val="222222"/>
+                </a:solidFill>
+                <a:latin typeface="Consolas"/>
+                <a:cs typeface="Consolas"/>
+              </a:rPr>
+              <a:t>RFS</a:t>
+            </a:r>
+            <a:r>
+              <a:rPr sz="1700" b="0">
+                <a:solidFill>
+                  <a:srgbClr val="222222"/>
+                </a:solidFill>
+                <a:latin typeface="맑은 고딕"/>
+              </a:rPr>
+              <a:t>(LGWR) 시퀀스 </a:t>
+            </a:r>
+            <a:r>
+              <a:rPr sz="1700" b="1">
+                <a:solidFill>
+                  <a:srgbClr val="222222"/>
+                </a:solidFill>
+                <a:latin typeface="맑은 고딕"/>
+              </a:rPr>
+              <a:t>74</a:t>
+            </a:r>
+            <a:r>
+              <a:rPr sz="1700" b="0">
+                <a:solidFill>
+                  <a:srgbClr val="222222"/>
+                </a:solidFill>
+                <a:latin typeface="맑은 고딕"/>
+              </a:rPr>
+              <a:t> 블록 </a:t>
+            </a:r>
+            <a:r>
+              <a:rPr sz="1700" b="1">
+                <a:solidFill>
+                  <a:srgbClr val="222222"/>
+                </a:solidFill>
+                <a:latin typeface="맑은 고딕"/>
+              </a:rPr>
+              <a:t>17964</a:t>
             </a:r>
           </a:p>
           <a:p>
@@ -7816,7 +8538,53 @@
                 </a:solidFill>
                 <a:latin typeface="맑은 고딕"/>
               </a:rPr>
-              <a:t>•  `MRP0` 시퀀스 **74** 블록 **17964**</a:t>
+              <a:t>•  </a:t>
+            </a:r>
+            <a:r>
+              <a:rPr sz="1700" b="0">
+                <a:solidFill>
+                  <a:srgbClr val="222222"/>
+                </a:solidFill>
+                <a:latin typeface="Consolas"/>
+                <a:cs typeface="Consolas"/>
+              </a:rPr>
+              <a:t>MRP0</a:t>
+            </a:r>
+            <a:r>
+              <a:rPr sz="1700" b="0">
+                <a:solidFill>
+                  <a:srgbClr val="222222"/>
+                </a:solidFill>
+                <a:latin typeface="맑은 고딕"/>
+              </a:rPr>
+              <a:t> 시퀀스 </a:t>
+            </a:r>
+            <a:r>
+              <a:rPr sz="1700" b="1">
+                <a:solidFill>
+                  <a:srgbClr val="222222"/>
+                </a:solidFill>
+                <a:latin typeface="맑은 고딕"/>
+              </a:rPr>
+              <a:t>74</a:t>
+            </a:r>
+            <a:r>
+              <a:rPr sz="1700" b="0">
+                <a:solidFill>
+                  <a:srgbClr val="222222"/>
+                </a:solidFill>
+                <a:latin typeface="맑은 고딕"/>
+              </a:rPr>
+              <a:t> 블록 </a:t>
+            </a:r>
+            <a:r>
+              <a:rPr sz="1700" b="1">
+                <a:solidFill>
+                  <a:srgbClr val="222222"/>
+                </a:solidFill>
+                <a:latin typeface="맑은 고딕"/>
+              </a:rPr>
+              <a:t>17964</a:t>
             </a:r>
           </a:p>
           <a:p>
@@ -7832,7 +8600,16 @@
                 </a:solidFill>
                 <a:latin typeface="맑은 고딕"/>
               </a:rPr>
-              <a:t>•  **두 값이 같으면 받는 즉시 적용 중**</a:t>
+              <a:t>•  </a:t>
+            </a:r>
+            <a:r>
+              <a:rPr sz="1700" b="1">
+                <a:solidFill>
+                  <a:srgbClr val="222222"/>
+                </a:solidFill>
+                <a:latin typeface="맑은 고딕"/>
+              </a:rPr>
+              <a:t>두 값이 같으면 받는 즉시 적용 중</a:t>
             </a:r>
           </a:p>
           <a:p>
@@ -7848,7 +8625,25 @@
                 </a:solidFill>
                 <a:latin typeface="맑은 고딕"/>
               </a:rPr>
-              <a:t>•  벌어지면 밀린 것 — **블록 단위로** 볼 수 있다</a:t>
+              <a:t>•  벌어지면 밀린 것 — </a:t>
+            </a:r>
+            <a:r>
+              <a:rPr sz="1700" b="1">
+                <a:solidFill>
+                  <a:srgbClr val="222222"/>
+                </a:solidFill>
+                <a:latin typeface="맑은 고딕"/>
+              </a:rPr>
+              <a:t>블록 단위로</a:t>
+            </a:r>
+            <a:r>
+              <a:rPr sz="1700" b="0">
+                <a:solidFill>
+                  <a:srgbClr val="222222"/>
+                </a:solidFill>
+                <a:latin typeface="맑은 고딕"/>
+              </a:rPr>
+              <a:t> 볼 수 있다</a:t>
             </a:r>
           </a:p>
         </p:txBody>
@@ -8027,7 +8822,25 @@
                 </a:solidFill>
                 <a:latin typeface="맑은 고딕"/>
               </a:rPr>
-              <a:t>•  같은 시퀀스가 **두 줄씩** 나온다</a:t>
+              <a:t>•  같은 시퀀스가 </a:t>
+            </a:r>
+            <a:r>
+              <a:rPr sz="1700" b="1">
+                <a:solidFill>
+                  <a:srgbClr val="222222"/>
+                </a:solidFill>
+                <a:latin typeface="맑은 고딕"/>
+              </a:rPr>
+              <a:t>두 줄씩</a:t>
+            </a:r>
+            <a:r>
+              <a:rPr sz="1700" b="0">
+                <a:solidFill>
+                  <a:srgbClr val="222222"/>
+                </a:solidFill>
+                <a:latin typeface="맑은 고딕"/>
+              </a:rPr>
+              <a:t> 나온다</a:t>
             </a:r>
           </a:p>
           <a:p>
@@ -8043,7 +8856,44 @@
                 </a:solidFill>
                 <a:latin typeface="맑은 고딕"/>
               </a:rPr>
-              <a:t>•  `dest_id=1` 은 **영원히 NO** — 로컬 아카이브다</a:t>
+              <a:t>•  </a:t>
+            </a:r>
+            <a:r>
+              <a:rPr sz="1700" b="0">
+                <a:solidFill>
+                  <a:srgbClr val="222222"/>
+                </a:solidFill>
+                <a:latin typeface="Consolas"/>
+                <a:cs typeface="Consolas"/>
+              </a:rPr>
+              <a:t>dest_id=1</a:t>
+            </a:r>
+            <a:r>
+              <a:rPr sz="1700" b="0">
+                <a:solidFill>
+                  <a:srgbClr val="222222"/>
+                </a:solidFill>
+                <a:latin typeface="맑은 고딕"/>
+              </a:rPr>
+              <a:t> 은 </a:t>
+            </a:r>
+            <a:r>
+              <a:rPr sz="1700" b="1">
+                <a:solidFill>
+                  <a:srgbClr val="222222"/>
+                </a:solidFill>
+                <a:latin typeface="맑은 고딕"/>
+              </a:rPr>
+              <a:t>영원히 NO</a:t>
+            </a:r>
+            <a:r>
+              <a:rPr sz="1700" b="0">
+                <a:solidFill>
+                  <a:srgbClr val="222222"/>
+                </a:solidFill>
+                <a:latin typeface="맑은 고딕"/>
+              </a:rPr>
+              <a:t> — 로컬 아카이브다</a:t>
             </a:r>
           </a:p>
           <a:p>
@@ -8059,7 +8909,26 @@
                 </a:solidFill>
                 <a:latin typeface="맑은 고딕"/>
               </a:rPr>
-              <a:t>•  `dest_id=2` 가 실제 적용 여부</a:t>
+              <a:t>•  </a:t>
+            </a:r>
+            <a:r>
+              <a:rPr sz="1700" b="0">
+                <a:solidFill>
+                  <a:srgbClr val="222222"/>
+                </a:solidFill>
+                <a:latin typeface="Consolas"/>
+                <a:cs typeface="Consolas"/>
+              </a:rPr>
+              <a:t>dest_id=2</a:t>
+            </a:r>
+            <a:r>
+              <a:rPr sz="1700" b="0">
+                <a:solidFill>
+                  <a:srgbClr val="222222"/>
+                </a:solidFill>
+                <a:latin typeface="맑은 고딕"/>
+              </a:rPr>
+              <a:t> 가 실제 적용 여부</a:t>
             </a:r>
           </a:p>
           <a:p>
@@ -8075,7 +8944,26 @@
                 </a:solidFill>
                 <a:latin typeface="맑은 고딕"/>
               </a:rPr>
-              <a:t>•  **`WHERE dest_id=2` 가 필수**</a:t>
+              <a:t>•  </a:t>
+            </a:r>
+            <a:r>
+              <a:rPr sz="1700" b="1">
+                <a:solidFill>
+                  <a:srgbClr val="222222"/>
+                </a:solidFill>
+                <a:latin typeface="Consolas"/>
+                <a:cs typeface="Consolas"/>
+              </a:rPr>
+              <a:t>WHERE dest_id=2</a:t>
+            </a:r>
+            <a:r>
+              <a:rPr sz="1700" b="1">
+                <a:solidFill>
+                  <a:srgbClr val="222222"/>
+                </a:solidFill>
+                <a:latin typeface="맑은 고딕"/>
+              </a:rPr>
+              <a:t> 가 필수</a:t>
             </a:r>
           </a:p>
         </p:txBody>
@@ -8254,7 +9142,54 @@
                 </a:solidFill>
                 <a:latin typeface="맑은 고딕"/>
               </a:rPr>
-              <a:t>•  `ARCHIVED_SEQ#` 73 인데 `APPLIED_SEQ#` **0**</a:t>
+              <a:t>•  </a:t>
+            </a:r>
+            <a:r>
+              <a:rPr sz="1700" b="0">
+                <a:solidFill>
+                  <a:srgbClr val="222222"/>
+                </a:solidFill>
+                <a:latin typeface="Consolas"/>
+                <a:cs typeface="Consolas"/>
+              </a:rPr>
+              <a:t>ARCHIVED_SEQ#</a:t>
+            </a:r>
+            <a:r>
+              <a:rPr sz="1700" b="0">
+                <a:solidFill>
+                  <a:srgbClr val="222222"/>
+                </a:solidFill>
+                <a:latin typeface="맑은 고딕"/>
+              </a:rPr>
+              <a:t> 73 인데 </a:t>
+            </a:r>
+            <a:r>
+              <a:rPr sz="1700" b="0">
+                <a:solidFill>
+                  <a:srgbClr val="222222"/>
+                </a:solidFill>
+                <a:latin typeface="Consolas"/>
+                <a:cs typeface="Consolas"/>
+              </a:rPr>
+              <a:t>APPLIED_SEQ#</a:t>
+            </a:r>
+            <a:r>
+              <a:rPr sz="1700" b="0">
+                <a:solidFill>
+                  <a:srgbClr val="222222"/>
+                </a:solidFill>
+                <a:latin typeface="맑은 고딕"/>
+              </a:rPr>
+              <a:t> </a:t>
+            </a:r>
+            <a:r>
+              <a:rPr sz="1700" b="1">
+                <a:solidFill>
+                  <a:srgbClr val="222222"/>
+                </a:solidFill>
+                <a:latin typeface="맑은 고딕"/>
+              </a:rPr>
+              <a:t>0</a:t>
             </a:r>
           </a:p>
           <a:p>
@@ -8270,7 +9205,16 @@
                 </a:solidFill>
                 <a:latin typeface="맑은 고딕"/>
               </a:rPr>
-              <a:t>•  적용이 멈춘 것이 **아니다**</a:t>
+              <a:t>•  적용이 멈춘 것이 </a:t>
+            </a:r>
+            <a:r>
+              <a:rPr sz="1700" b="1">
+                <a:solidFill>
+                  <a:srgbClr val="222222"/>
+                </a:solidFill>
+                <a:latin typeface="맑은 고딕"/>
+              </a:rPr>
+              <a:t>아니다</a:t>
             </a:r>
           </a:p>
           <a:p>
@@ -8286,7 +9230,16 @@
                 </a:solidFill>
                 <a:latin typeface="맑은 고딕"/>
               </a:rPr>
-              <a:t>•  **실시간 적용은 SRL 에서 직접 읽는다**</a:t>
+              <a:t>•  </a:t>
+            </a:r>
+            <a:r>
+              <a:rPr sz="1700" b="1">
+                <a:solidFill>
+                  <a:srgbClr val="222222"/>
+                </a:solidFill>
+                <a:latin typeface="맑은 고딕"/>
+              </a:rPr>
+              <a:t>실시간 적용은 SRL 에서 직접 읽는다</a:t>
             </a:r>
           </a:p>
           <a:p>
@@ -8302,7 +9255,36 @@
                 </a:solidFill>
                 <a:latin typeface="맑은 고딕"/>
               </a:rPr>
-              <a:t>•  근거 — `RECOVERY_MODE` = `MANAGED REAL TIME APPLY`</a:t>
+              <a:t>•  근거 — </a:t>
+            </a:r>
+            <a:r>
+              <a:rPr sz="1700" b="0">
+                <a:solidFill>
+                  <a:srgbClr val="222222"/>
+                </a:solidFill>
+                <a:latin typeface="Consolas"/>
+                <a:cs typeface="Consolas"/>
+              </a:rPr>
+              <a:t>RECOVERY_MODE</a:t>
+            </a:r>
+            <a:r>
+              <a:rPr sz="1700" b="0">
+                <a:solidFill>
+                  <a:srgbClr val="222222"/>
+                </a:solidFill>
+                <a:latin typeface="맑은 고딕"/>
+              </a:rPr>
+              <a:t> = </a:t>
+            </a:r>
+            <a:r>
+              <a:rPr sz="1700" b="0">
+                <a:solidFill>
+                  <a:srgbClr val="222222"/>
+                </a:solidFill>
+                <a:latin typeface="Consolas"/>
+                <a:cs typeface="Consolas"/>
+              </a:rPr>
+              <a:t>MANAGED REAL TIME APPLY</a:t>
             </a:r>
           </a:p>
         </p:txBody>
@@ -8442,7 +9424,64 @@
                 </a:solidFill>
                 <a:latin typeface="맑은 고딕"/>
               </a:rPr>
-              <a:t>•  `V$LOG` · `V$LOGFILE` · `V$STANDBY_LOG` 의 STATUS 를 역할별로 해석한다.</a:t>
+              <a:t>•  </a:t>
+            </a:r>
+            <a:r>
+              <a:rPr sz="1600" b="0">
+                <a:solidFill>
+                  <a:srgbClr val="222222"/>
+                </a:solidFill>
+                <a:latin typeface="Consolas"/>
+                <a:cs typeface="Consolas"/>
+              </a:rPr>
+              <a:t>V$LOG</a:t>
+            </a:r>
+            <a:r>
+              <a:rPr sz="1600" b="0">
+                <a:solidFill>
+                  <a:srgbClr val="222222"/>
+                </a:solidFill>
+                <a:latin typeface="맑은 고딕"/>
+              </a:rPr>
+              <a:t> · </a:t>
+            </a:r>
+            <a:r>
+              <a:rPr sz="1600" b="0">
+                <a:solidFill>
+                  <a:srgbClr val="222222"/>
+                </a:solidFill>
+                <a:latin typeface="Consolas"/>
+                <a:cs typeface="Consolas"/>
+              </a:rPr>
+              <a:t>V$LOGFILE</a:t>
+            </a:r>
+            <a:r>
+              <a:rPr sz="1600" b="0">
+                <a:solidFill>
+                  <a:srgbClr val="222222"/>
+                </a:solidFill>
+                <a:latin typeface="맑은 고딕"/>
+              </a:rPr>
+              <a:t> · </a:t>
+            </a:r>
+            <a:r>
+              <a:rPr sz="1600" b="0">
+                <a:solidFill>
+                  <a:srgbClr val="222222"/>
+                </a:solidFill>
+                <a:latin typeface="Consolas"/>
+                <a:cs typeface="Consolas"/>
+              </a:rPr>
+              <a:t>V$STANDBY_LOG</a:t>
+            </a:r>
+            <a:r>
+              <a:rPr sz="1600" b="0">
+                <a:solidFill>
+                  <a:srgbClr val="222222"/>
+                </a:solidFill>
+                <a:latin typeface="맑은 고딕"/>
+              </a:rPr>
+              <a:t> 의 STATUS 를 역할별로 해석한다.</a:t>
             </a:r>
           </a:p>
           <a:p>
@@ -8458,7 +9497,45 @@
                 </a:solidFill>
                 <a:latin typeface="맑은 고딕"/>
               </a:rPr>
-              <a:t>•  `V$ARCHIVE_DEST` 와 `V$ARCHIVE_DEST_STATUS` 의 관점 차이를 안다.</a:t>
+              <a:t>•  </a:t>
+            </a:r>
+            <a:r>
+              <a:rPr sz="1600" b="0">
+                <a:solidFill>
+                  <a:srgbClr val="222222"/>
+                </a:solidFill>
+                <a:latin typeface="Consolas"/>
+                <a:cs typeface="Consolas"/>
+              </a:rPr>
+              <a:t>V$ARCHIVE_DEST</a:t>
+            </a:r>
+            <a:r>
+              <a:rPr sz="1600" b="0">
+                <a:solidFill>
+                  <a:srgbClr val="222222"/>
+                </a:solidFill>
+                <a:latin typeface="맑은 고딕"/>
+              </a:rPr>
+              <a:t> 와 </a:t>
+            </a:r>
+            <a:r>
+              <a:rPr sz="1600" b="0">
+                <a:solidFill>
+                  <a:srgbClr val="222222"/>
+                </a:solidFill>
+                <a:latin typeface="Consolas"/>
+                <a:cs typeface="Consolas"/>
+              </a:rPr>
+              <a:t>V$ARCHIVE_DEST_STATUS</a:t>
+            </a:r>
+            <a:r>
+              <a:rPr sz="1600" b="0">
+                <a:solidFill>
+                  <a:srgbClr val="222222"/>
+                </a:solidFill>
+                <a:latin typeface="맑은 고딕"/>
+              </a:rPr>
+              <a:t> 의 관점 차이를 안다.</a:t>
             </a:r>
           </a:p>
           <a:p>
@@ -8474,7 +9551,64 @@
                 </a:solidFill>
                 <a:latin typeface="맑은 고딕"/>
               </a:rPr>
-              <a:t>•  `VALID_NOW` · `VALID_TYPE` · `VALID_ROLE` 로 목적지를 판정한다.</a:t>
+              <a:t>•  </a:t>
+            </a:r>
+            <a:r>
+              <a:rPr sz="1600" b="0">
+                <a:solidFill>
+                  <a:srgbClr val="222222"/>
+                </a:solidFill>
+                <a:latin typeface="Consolas"/>
+                <a:cs typeface="Consolas"/>
+              </a:rPr>
+              <a:t>VALID_NOW</a:t>
+            </a:r>
+            <a:r>
+              <a:rPr sz="1600" b="0">
+                <a:solidFill>
+                  <a:srgbClr val="222222"/>
+                </a:solidFill>
+                <a:latin typeface="맑은 고딕"/>
+              </a:rPr>
+              <a:t> · </a:t>
+            </a:r>
+            <a:r>
+              <a:rPr sz="1600" b="0">
+                <a:solidFill>
+                  <a:srgbClr val="222222"/>
+                </a:solidFill>
+                <a:latin typeface="Consolas"/>
+                <a:cs typeface="Consolas"/>
+              </a:rPr>
+              <a:t>VALID_TYPE</a:t>
+            </a:r>
+            <a:r>
+              <a:rPr sz="1600" b="0">
+                <a:solidFill>
+                  <a:srgbClr val="222222"/>
+                </a:solidFill>
+                <a:latin typeface="맑은 고딕"/>
+              </a:rPr>
+              <a:t> · </a:t>
+            </a:r>
+            <a:r>
+              <a:rPr sz="1600" b="0">
+                <a:solidFill>
+                  <a:srgbClr val="222222"/>
+                </a:solidFill>
+                <a:latin typeface="Consolas"/>
+                <a:cs typeface="Consolas"/>
+              </a:rPr>
+              <a:t>VALID_ROLE</a:t>
+            </a:r>
+            <a:r>
+              <a:rPr sz="1600" b="0">
+                <a:solidFill>
+                  <a:srgbClr val="222222"/>
+                </a:solidFill>
+                <a:latin typeface="맑은 고딕"/>
+              </a:rPr>
+              <a:t> 로 목적지를 판정한다.</a:t>
             </a:r>
           </a:p>
           <a:p>
@@ -8490,7 +9624,26 @@
                 </a:solidFill>
                 <a:latin typeface="맑은 고딕"/>
               </a:rPr>
-              <a:t>•  전송이 끊긴 상황을 만들어 `ERROR` 열을 확인하고 복구를 검증한다.</a:t>
+              <a:t>•  전송이 끊긴 상황을 만들어 </a:t>
+            </a:r>
+            <a:r>
+              <a:rPr sz="1600" b="0">
+                <a:solidFill>
+                  <a:srgbClr val="222222"/>
+                </a:solidFill>
+                <a:latin typeface="Consolas"/>
+                <a:cs typeface="Consolas"/>
+              </a:rPr>
+              <a:t>ERROR</a:t>
+            </a:r>
+            <a:r>
+              <a:rPr sz="1600" b="0">
+                <a:solidFill>
+                  <a:srgbClr val="222222"/>
+                </a:solidFill>
+                <a:latin typeface="맑은 고딕"/>
+              </a:rPr>
+              <a:t> 열을 확인하고 복구를 검증한다.</a:t>
             </a:r>
           </a:p>
           <a:p>
@@ -8506,7 +9659,45 @@
                 </a:solidFill>
                 <a:latin typeface="맑은 고딕"/>
               </a:rPr>
-              <a:t>•  `V$ARCHIVED_LOG` 의 `APPLIED` 가 목적지마다 다른 이유를 설명한다.</a:t>
+              <a:t>•  </a:t>
+            </a:r>
+            <a:r>
+              <a:rPr sz="1600" b="0">
+                <a:solidFill>
+                  <a:srgbClr val="222222"/>
+                </a:solidFill>
+                <a:latin typeface="Consolas"/>
+                <a:cs typeface="Consolas"/>
+              </a:rPr>
+              <a:t>V$ARCHIVED_LOG</a:t>
+            </a:r>
+            <a:r>
+              <a:rPr sz="1600" b="0">
+                <a:solidFill>
+                  <a:srgbClr val="222222"/>
+                </a:solidFill>
+                <a:latin typeface="맑은 고딕"/>
+              </a:rPr>
+              <a:t> 의 </a:t>
+            </a:r>
+            <a:r>
+              <a:rPr sz="1600" b="0">
+                <a:solidFill>
+                  <a:srgbClr val="222222"/>
+                </a:solidFill>
+                <a:latin typeface="Consolas"/>
+                <a:cs typeface="Consolas"/>
+              </a:rPr>
+              <a:t>APPLIED</a:t>
+            </a:r>
+            <a:r>
+              <a:rPr sz="1600" b="0">
+                <a:solidFill>
+                  <a:srgbClr val="222222"/>
+                </a:solidFill>
+                <a:latin typeface="맑은 고딕"/>
+              </a:rPr>
+              <a:t> 가 목적지마다 다른 이유를 설명한다.</a:t>
             </a:r>
           </a:p>
           <a:p>
@@ -8522,7 +9713,26 @@
                 </a:solidFill>
                 <a:latin typeface="맑은 고딕"/>
               </a:rPr>
-              <a:t>•  `V$MANAGED_STANDBY` 의 프로세스 구성을 읽는다.</a:t>
+              <a:t>•  </a:t>
+            </a:r>
+            <a:r>
+              <a:rPr sz="1600" b="0">
+                <a:solidFill>
+                  <a:srgbClr val="222222"/>
+                </a:solidFill>
+                <a:latin typeface="Consolas"/>
+                <a:cs typeface="Consolas"/>
+              </a:rPr>
+              <a:t>V$MANAGED_STANDBY</a:t>
+            </a:r>
+            <a:r>
+              <a:rPr sz="1600" b="0">
+                <a:solidFill>
+                  <a:srgbClr val="222222"/>
+                </a:solidFill>
+                <a:latin typeface="맑은 고딕"/>
+              </a:rPr>
+              <a:t> 의 프로세스 구성을 읽는다.</a:t>
             </a:r>
           </a:p>
           <a:p>
@@ -8538,7 +9748,26 @@
                 </a:solidFill>
                 <a:latin typeface="맑은 고딕"/>
               </a:rPr>
-              <a:t>•  `LOG_ARCHIVE_TRACE` 로 추적을 켜고 트레이스 파일을 읽는다.</a:t>
+              <a:t>•  </a:t>
+            </a:r>
+            <a:r>
+              <a:rPr sz="1600" b="0">
+                <a:solidFill>
+                  <a:srgbClr val="222222"/>
+                </a:solidFill>
+                <a:latin typeface="Consolas"/>
+                <a:cs typeface="Consolas"/>
+              </a:rPr>
+              <a:t>LOG_ARCHIVE_TRACE</a:t>
+            </a:r>
+            <a:r>
+              <a:rPr sz="1600" b="0">
+                <a:solidFill>
+                  <a:srgbClr val="222222"/>
+                </a:solidFill>
+                <a:latin typeface="맑은 고딕"/>
+              </a:rPr>
+              <a:t> 로 추적을 켜고 트레이스 파일을 읽는다.</a:t>
             </a:r>
           </a:p>
           <a:p>
@@ -8554,7 +9783,26 @@
                 </a:solidFill>
                 <a:latin typeface="맑은 고딕"/>
               </a:rPr>
-              <a:t>•  Logical Standby 에서 어떤 뷰가 비는지 알고 `V$LOGSTDBY_TRANSACTION` 을 읽는다.</a:t>
+              <a:t>•  Logical Standby 에서 어떤 뷰가 비는지 알고 </a:t>
+            </a:r>
+            <a:r>
+              <a:rPr sz="1600" b="0">
+                <a:solidFill>
+                  <a:srgbClr val="222222"/>
+                </a:solidFill>
+                <a:latin typeface="Consolas"/>
+                <a:cs typeface="Consolas"/>
+              </a:rPr>
+              <a:t>V$LOGSTDBY_TRANSACTION</a:t>
+            </a:r>
+            <a:r>
+              <a:rPr sz="1600" b="0">
+                <a:solidFill>
+                  <a:srgbClr val="222222"/>
+                </a:solidFill>
+                <a:latin typeface="맑은 고딕"/>
+              </a:rPr>
+              <a:t> 을 읽는다.</a:t>
             </a:r>
           </a:p>
           <a:p>
@@ -9004,7 +10252,35 @@
                 </a:solidFill>
                 <a:latin typeface="맑은 고딕"/>
               </a:rPr>
-              <a:t>•  14장은 속성으로 껐다 — **의도한 중단**, `SUCCESS`</a:t>
+              <a:t>•  14장은 속성으로 껐다 — </a:t>
+            </a:r>
+            <a:r>
+              <a:rPr sz="1700" b="1">
+                <a:solidFill>
+                  <a:srgbClr val="222222"/>
+                </a:solidFill>
+                <a:latin typeface="맑은 고딕"/>
+              </a:rPr>
+              <a:t>의도한 중단</a:t>
+            </a:r>
+            <a:r>
+              <a:rPr sz="1700" b="0">
+                <a:solidFill>
+                  <a:srgbClr val="222222"/>
+                </a:solidFill>
+                <a:latin typeface="맑은 고딕"/>
+              </a:rPr>
+              <a:t>, </a:t>
+            </a:r>
+            <a:r>
+              <a:rPr sz="1700" b="0">
+                <a:solidFill>
+                  <a:srgbClr val="222222"/>
+                </a:solidFill>
+                <a:latin typeface="Consolas"/>
+                <a:cs typeface="Consolas"/>
+              </a:rPr>
+              <a:t>SUCCESS</a:t>
             </a:r>
           </a:p>
           <a:p>
@@ -9020,7 +10296,35 @@
                 </a:solidFill>
                 <a:latin typeface="맑은 고딕"/>
               </a:rPr>
-              <a:t>•  이번은 `lsnrctl stop` — **장애**</a:t>
+              <a:t>•  이번은 </a:t>
+            </a:r>
+            <a:r>
+              <a:rPr sz="1700" b="0">
+                <a:solidFill>
+                  <a:srgbClr val="222222"/>
+                </a:solidFill>
+                <a:latin typeface="Consolas"/>
+                <a:cs typeface="Consolas"/>
+              </a:rPr>
+              <a:t>lsnrctl stop</a:t>
+            </a:r>
+            <a:r>
+              <a:rPr sz="1700" b="0">
+                <a:solidFill>
+                  <a:srgbClr val="222222"/>
+                </a:solidFill>
+                <a:latin typeface="맑은 고딕"/>
+              </a:rPr>
+              <a:t> — </a:t>
+            </a:r>
+            <a:r>
+              <a:rPr sz="1700" b="1">
+                <a:solidFill>
+                  <a:srgbClr val="222222"/>
+                </a:solidFill>
+                <a:latin typeface="맑은 고딕"/>
+              </a:rPr>
+              <a:t>장애</a:t>
             </a:r>
           </a:p>
           <a:p>
@@ -9036,7 +10340,36 @@
                 </a:solidFill>
                 <a:latin typeface="맑은 고딕"/>
               </a:rPr>
-              <a:t>•  `TNS-12541` / `Linux Error: 111: Connection refused`</a:t>
+              <a:t>•  </a:t>
+            </a:r>
+            <a:r>
+              <a:rPr sz="1700" b="0">
+                <a:solidFill>
+                  <a:srgbClr val="222222"/>
+                </a:solidFill>
+                <a:latin typeface="Consolas"/>
+                <a:cs typeface="Consolas"/>
+              </a:rPr>
+              <a:t>TNS-12541</a:t>
+            </a:r>
+            <a:r>
+              <a:rPr sz="1700" b="0">
+                <a:solidFill>
+                  <a:srgbClr val="222222"/>
+                </a:solidFill>
+                <a:latin typeface="맑은 고딕"/>
+              </a:rPr>
+              <a:t> / </a:t>
+            </a:r>
+            <a:r>
+              <a:rPr sz="1700" b="0">
+                <a:solidFill>
+                  <a:srgbClr val="222222"/>
+                </a:solidFill>
+                <a:latin typeface="Consolas"/>
+                <a:cs typeface="Consolas"/>
+              </a:rPr>
+              <a:t>Linux Error: 111: Connection refused</a:t>
             </a:r>
           </a:p>
           <a:p>
@@ -9231,7 +10564,55 @@
                 </a:solidFill>
                 <a:latin typeface="맑은 고딕"/>
               </a:rPr>
-              <a:t>•  `STATUS` `VALID` → **`ERROR`**</a:t>
+              <a:t>•  </a:t>
+            </a:r>
+            <a:r>
+              <a:rPr sz="1700" b="0">
+                <a:solidFill>
+                  <a:srgbClr val="222222"/>
+                </a:solidFill>
+                <a:latin typeface="Consolas"/>
+                <a:cs typeface="Consolas"/>
+              </a:rPr>
+              <a:t>STATUS</a:t>
+            </a:r>
+            <a:r>
+              <a:rPr sz="1700" b="0">
+                <a:solidFill>
+                  <a:srgbClr val="222222"/>
+                </a:solidFill>
+                <a:latin typeface="맑은 고딕"/>
+              </a:rPr>
+              <a:t> </a:t>
+            </a:r>
+            <a:r>
+              <a:rPr sz="1700" b="0">
+                <a:solidFill>
+                  <a:srgbClr val="222222"/>
+                </a:solidFill>
+                <a:latin typeface="Consolas"/>
+                <a:cs typeface="Consolas"/>
+              </a:rPr>
+              <a:t>VALID</a:t>
+            </a:r>
+            <a:r>
+              <a:rPr sz="1700" b="0">
+                <a:solidFill>
+                  <a:srgbClr val="222222"/>
+                </a:solidFill>
+                <a:latin typeface="맑은 고딕"/>
+              </a:rPr>
+              <a:t> → </a:t>
+            </a:r>
+            <a:r>
+              <a:rPr sz="1700" b="1">
+                <a:solidFill>
+                  <a:srgbClr val="222222"/>
+                </a:solidFill>
+                <a:latin typeface="Consolas"/>
+                <a:cs typeface="Consolas"/>
+              </a:rPr>
+              <a:t>ERROR</a:t>
             </a:r>
           </a:p>
           <a:p>
@@ -9247,7 +10628,55 @@
                 </a:solidFill>
                 <a:latin typeface="맑은 고딕"/>
               </a:rPr>
-              <a:t>•  `VALID_NOW` `YES` → **`INACTIVE`**</a:t>
+              <a:t>•  </a:t>
+            </a:r>
+            <a:r>
+              <a:rPr sz="1700" b="0">
+                <a:solidFill>
+                  <a:srgbClr val="222222"/>
+                </a:solidFill>
+                <a:latin typeface="Consolas"/>
+                <a:cs typeface="Consolas"/>
+              </a:rPr>
+              <a:t>VALID_NOW</a:t>
+            </a:r>
+            <a:r>
+              <a:rPr sz="1700" b="0">
+                <a:solidFill>
+                  <a:srgbClr val="222222"/>
+                </a:solidFill>
+                <a:latin typeface="맑은 고딕"/>
+              </a:rPr>
+              <a:t> </a:t>
+            </a:r>
+            <a:r>
+              <a:rPr sz="1700" b="0">
+                <a:solidFill>
+                  <a:srgbClr val="222222"/>
+                </a:solidFill>
+                <a:latin typeface="Consolas"/>
+                <a:cs typeface="Consolas"/>
+              </a:rPr>
+              <a:t>YES</a:t>
+            </a:r>
+            <a:r>
+              <a:rPr sz="1700" b="0">
+                <a:solidFill>
+                  <a:srgbClr val="222222"/>
+                </a:solidFill>
+                <a:latin typeface="맑은 고딕"/>
+              </a:rPr>
+              <a:t> → </a:t>
+            </a:r>
+            <a:r>
+              <a:rPr sz="1700" b="1">
+                <a:solidFill>
+                  <a:srgbClr val="222222"/>
+                </a:solidFill>
+                <a:latin typeface="Consolas"/>
+                <a:cs typeface="Consolas"/>
+              </a:rPr>
+              <a:t>INACTIVE</a:t>
             </a:r>
           </a:p>
           <a:p>
@@ -9263,7 +10692,36 @@
                 </a:solidFill>
                 <a:latin typeface="맑은 고딕"/>
               </a:rPr>
-              <a:t>•  `ERROR` (빈값) → **`ORA-12541: TNS:no listener`**</a:t>
+              <a:t>•  </a:t>
+            </a:r>
+            <a:r>
+              <a:rPr sz="1700" b="0">
+                <a:solidFill>
+                  <a:srgbClr val="222222"/>
+                </a:solidFill>
+                <a:latin typeface="Consolas"/>
+                <a:cs typeface="Consolas"/>
+              </a:rPr>
+              <a:t>ERROR</a:t>
+            </a:r>
+            <a:r>
+              <a:rPr sz="1700" b="0">
+                <a:solidFill>
+                  <a:srgbClr val="222222"/>
+                </a:solidFill>
+                <a:latin typeface="맑은 고딕"/>
+              </a:rPr>
+              <a:t> (빈값) → </a:t>
+            </a:r>
+            <a:r>
+              <a:rPr sz="1700" b="1">
+                <a:solidFill>
+                  <a:srgbClr val="222222"/>
+                </a:solidFill>
+                <a:latin typeface="Consolas"/>
+                <a:cs typeface="Consolas"/>
+              </a:rPr>
+              <a:t>ORA-12541: TNS:no listener</a:t>
             </a:r>
           </a:p>
           <a:p>
@@ -9279,7 +10737,45 @@
                 </a:solidFill>
                 <a:latin typeface="맑은 고딕"/>
               </a:rPr>
-              <a:t>•  `LOG_ARCHIVE_DEST_STATE_2` 는 **`ENABLE` 그대로**</a:t>
+              <a:t>•  </a:t>
+            </a:r>
+            <a:r>
+              <a:rPr sz="1700" b="0">
+                <a:solidFill>
+                  <a:srgbClr val="222222"/>
+                </a:solidFill>
+                <a:latin typeface="Consolas"/>
+                <a:cs typeface="Consolas"/>
+              </a:rPr>
+              <a:t>LOG_ARCHIVE_DEST_STATE_2</a:t>
+            </a:r>
+            <a:r>
+              <a:rPr sz="1700" b="0">
+                <a:solidFill>
+                  <a:srgbClr val="222222"/>
+                </a:solidFill>
+                <a:latin typeface="맑은 고딕"/>
+              </a:rPr>
+              <a:t> 는 </a:t>
+            </a:r>
+            <a:r>
+              <a:rPr sz="1700" b="1">
+                <a:solidFill>
+                  <a:srgbClr val="222222"/>
+                </a:solidFill>
+                <a:latin typeface="Consolas"/>
+                <a:cs typeface="Consolas"/>
+              </a:rPr>
+              <a:t>ENABLE</a:t>
+            </a:r>
+            <a:r>
+              <a:rPr sz="1700" b="1">
+                <a:solidFill>
+                  <a:srgbClr val="222222"/>
+                </a:solidFill>
+                <a:latin typeface="맑은 고딕"/>
+              </a:rPr>
+              <a:t> 그대로</a:t>
             </a:r>
           </a:p>
         </p:txBody>
@@ -9458,7 +10954,73 @@
                 </a:solidFill>
                 <a:latin typeface="맑은 고딕"/>
               </a:rPr>
-              <a:t>•  **접속 문자열 전체** — `HOST`·`PORT`·`SERVICE_NAME`</a:t>
+              <a:t>•  </a:t>
+            </a:r>
+            <a:r>
+              <a:rPr sz="1700" b="1">
+                <a:solidFill>
+                  <a:srgbClr val="222222"/>
+                </a:solidFill>
+                <a:latin typeface="맑은 고딕"/>
+              </a:rPr>
+              <a:t>접속 문자열 전체</a:t>
+            </a:r>
+            <a:r>
+              <a:rPr sz="1700" b="0">
+                <a:solidFill>
+                  <a:srgbClr val="222222"/>
+                </a:solidFill>
+                <a:latin typeface="맑은 고딕"/>
+              </a:rPr>
+              <a:t> — </a:t>
+            </a:r>
+            <a:r>
+              <a:rPr sz="1700" b="0">
+                <a:solidFill>
+                  <a:srgbClr val="222222"/>
+                </a:solidFill>
+                <a:latin typeface="Consolas"/>
+                <a:cs typeface="Consolas"/>
+              </a:rPr>
+              <a:t>HOST</a:t>
+            </a:r>
+            <a:r>
+              <a:rPr sz="1700" b="0">
+                <a:solidFill>
+                  <a:srgbClr val="222222"/>
+                </a:solidFill>
+                <a:latin typeface="맑은 고딕"/>
+              </a:rPr>
+              <a:t>·</a:t>
+            </a:r>
+            <a:r>
+              <a:rPr sz="1700" b="0">
+                <a:solidFill>
+                  <a:srgbClr val="222222"/>
+                </a:solidFill>
+                <a:latin typeface="Consolas"/>
+                <a:cs typeface="Consolas"/>
+              </a:rPr>
+              <a:t>PORT</a:t>
+            </a:r>
+            <a:r>
+              <a:rPr sz="1700" b="0">
+                <a:solidFill>
+                  <a:srgbClr val="222222"/>
+                </a:solidFill>
+                <a:latin typeface="맑은 고딕"/>
+              </a:rPr>
+              <a:t>·</a:t>
+            </a:r>
+            <a:r>
+              <a:rPr sz="1700" b="0">
+                <a:solidFill>
+                  <a:srgbClr val="222222"/>
+                </a:solidFill>
+                <a:latin typeface="Consolas"/>
+                <a:cs typeface="Consolas"/>
+              </a:rPr>
+              <a:t>SERVICE_NAME</a:t>
             </a:r>
           </a:p>
           <a:p>
@@ -9474,7 +11036,35 @@
                 </a:solidFill>
                 <a:latin typeface="맑은 고딕"/>
               </a:rPr>
-              <a:t>•  **프로세스** — `ARC1 (PID:2482)`</a:t>
+              <a:t>•  </a:t>
+            </a:r>
+            <a:r>
+              <a:rPr sz="1700" b="1">
+                <a:solidFill>
+                  <a:srgbClr val="222222"/>
+                </a:solidFill>
+                <a:latin typeface="맑은 고딕"/>
+              </a:rPr>
+              <a:t>프로세스</a:t>
+            </a:r>
+            <a:r>
+              <a:rPr sz="1700" b="0">
+                <a:solidFill>
+                  <a:srgbClr val="222222"/>
+                </a:solidFill>
+                <a:latin typeface="맑은 고딕"/>
+              </a:rPr>
+              <a:t> — </a:t>
+            </a:r>
+            <a:r>
+              <a:rPr sz="1700" b="0">
+                <a:solidFill>
+                  <a:srgbClr val="222222"/>
+                </a:solidFill>
+                <a:latin typeface="Consolas"/>
+                <a:cs typeface="Consolas"/>
+              </a:rPr>
+              <a:t>ARC1 (PID:2482)</a:t>
             </a:r>
           </a:p>
           <a:p>
@@ -9490,7 +11080,35 @@
                 </a:solidFill>
                 <a:latin typeface="맑은 고딕"/>
               </a:rPr>
-              <a:t>•  **트레이스 파일 이름** — `chicago_arc1_2482.trc`</a:t>
+              <a:t>•  </a:t>
+            </a:r>
+            <a:r>
+              <a:rPr sz="1700" b="1">
+                <a:solidFill>
+                  <a:srgbClr val="222222"/>
+                </a:solidFill>
+                <a:latin typeface="맑은 고딕"/>
+              </a:rPr>
+              <a:t>트레이스 파일 이름</a:t>
+            </a:r>
+            <a:r>
+              <a:rPr sz="1700" b="0">
+                <a:solidFill>
+                  <a:srgbClr val="222222"/>
+                </a:solidFill>
+                <a:latin typeface="맑은 고딕"/>
+              </a:rPr>
+              <a:t> — </a:t>
+            </a:r>
+            <a:r>
+              <a:rPr sz="1700" b="0">
+                <a:solidFill>
+                  <a:srgbClr val="222222"/>
+                </a:solidFill>
+                <a:latin typeface="Consolas"/>
+                <a:cs typeface="Consolas"/>
+              </a:rPr>
+              <a:t>chicago_arc1_2482.trc</a:t>
             </a:r>
           </a:p>
           <a:p>
@@ -9506,7 +11124,36 @@
                 </a:solidFill>
                 <a:latin typeface="맑은 고딕"/>
               </a:rPr>
-              <a:t>•  `ORA-16055` / **`archiver continuing`**</a:t>
+              <a:t>•  </a:t>
+            </a:r>
+            <a:r>
+              <a:rPr sz="1700" b="0">
+                <a:solidFill>
+                  <a:srgbClr val="222222"/>
+                </a:solidFill>
+                <a:latin typeface="Consolas"/>
+                <a:cs typeface="Consolas"/>
+              </a:rPr>
+              <a:t>ORA-16055</a:t>
+            </a:r>
+            <a:r>
+              <a:rPr sz="1700" b="0">
+                <a:solidFill>
+                  <a:srgbClr val="222222"/>
+                </a:solidFill>
+                <a:latin typeface="맑은 고딕"/>
+              </a:rPr>
+              <a:t> / </a:t>
+            </a:r>
+            <a:r>
+              <a:rPr sz="1700" b="1">
+                <a:solidFill>
+                  <a:srgbClr val="222222"/>
+                </a:solidFill>
+                <a:latin typeface="Consolas"/>
+                <a:cs typeface="Consolas"/>
+              </a:rPr>
+              <a:t>archiver continuing</a:t>
             </a:r>
           </a:p>
         </p:txBody>
@@ -9685,7 +11332,44 @@
                 </a:solidFill>
                 <a:latin typeface="맑은 고딕"/>
               </a:rPr>
-              <a:t>•  14장 — `SRL selected ...` **Warning 인데 ERROR_CODE 0** (정상)</a:t>
+              <a:t>•  14장 — </a:t>
+            </a:r>
+            <a:r>
+              <a:rPr sz="1700" b="0">
+                <a:solidFill>
+                  <a:srgbClr val="222222"/>
+                </a:solidFill>
+                <a:latin typeface="Consolas"/>
+                <a:cs typeface="Consolas"/>
+              </a:rPr>
+              <a:t>SRL selected ...</a:t>
+            </a:r>
+            <a:r>
+              <a:rPr sz="1700" b="0">
+                <a:solidFill>
+                  <a:srgbClr val="222222"/>
+                </a:solidFill>
+                <a:latin typeface="맑은 고딕"/>
+              </a:rPr>
+              <a:t> </a:t>
+            </a:r>
+            <a:r>
+              <a:rPr sz="1700" b="1">
+                <a:solidFill>
+                  <a:srgbClr val="222222"/>
+                </a:solidFill>
+                <a:latin typeface="맑은 고딕"/>
+              </a:rPr>
+              <a:t>Warning 인데 ERROR_CODE 0</a:t>
+            </a:r>
+            <a:r>
+              <a:rPr sz="1700" b="0">
+                <a:solidFill>
+                  <a:srgbClr val="222222"/>
+                </a:solidFill>
+                <a:latin typeface="맑은 고딕"/>
+              </a:rPr>
+              <a:t> (정상)</a:t>
             </a:r>
           </a:p>
           <a:p>
@@ -9701,7 +11385,35 @@
                 </a:solidFill>
                 <a:latin typeface="맑은 고딕"/>
               </a:rPr>
-              <a:t>•  15장 — `Check whether the listener is up` **Warning 인데 12541**</a:t>
+              <a:t>•  15장 — </a:t>
+            </a:r>
+            <a:r>
+              <a:rPr sz="1700" b="0">
+                <a:solidFill>
+                  <a:srgbClr val="222222"/>
+                </a:solidFill>
+                <a:latin typeface="Consolas"/>
+                <a:cs typeface="Consolas"/>
+              </a:rPr>
+              <a:t>Check whether the listener is up</a:t>
+            </a:r>
+            <a:r>
+              <a:rPr sz="1700" b="0">
+                <a:solidFill>
+                  <a:srgbClr val="222222"/>
+                </a:solidFill>
+                <a:latin typeface="맑은 고딕"/>
+              </a:rPr>
+              <a:t> </a:t>
+            </a:r>
+            <a:r>
+              <a:rPr sz="1700" b="1">
+                <a:solidFill>
+                  <a:srgbClr val="222222"/>
+                </a:solidFill>
+                <a:latin typeface="맑은 고딕"/>
+              </a:rPr>
+              <a:t>Warning 인데 12541</a:t>
             </a:r>
           </a:p>
           <a:p>
@@ -9717,7 +11429,26 @@
                 </a:solidFill>
                 <a:latin typeface="맑은 고딕"/>
               </a:rPr>
-              <a:t>•  **`Warning` 은 위험도 안전도 뜻하지 않는다**</a:t>
+              <a:t>•  </a:t>
+            </a:r>
+            <a:r>
+              <a:rPr sz="1700" b="1">
+                <a:solidFill>
+                  <a:srgbClr val="222222"/>
+                </a:solidFill>
+                <a:latin typeface="Consolas"/>
+                <a:cs typeface="Consolas"/>
+              </a:rPr>
+              <a:t>Warning</a:t>
+            </a:r>
+            <a:r>
+              <a:rPr sz="1700" b="1">
+                <a:solidFill>
+                  <a:srgbClr val="222222"/>
+                </a:solidFill>
+                <a:latin typeface="맑은 고딕"/>
+              </a:rPr>
+              <a:t> 은 위험도 안전도 뜻하지 않는다</a:t>
             </a:r>
           </a:p>
           <a:p>
@@ -9733,7 +11464,17 @@
                 </a:solidFill>
                 <a:latin typeface="맑은 고딕"/>
               </a:rPr>
-              <a:t>•  판정 기준은 `ERROR_CODE`</a:t>
+              <a:t>•  판정 기준은 </a:t>
+            </a:r>
+            <a:r>
+              <a:rPr sz="1700" b="0">
+                <a:solidFill>
+                  <a:srgbClr val="222222"/>
+                </a:solidFill>
+                <a:latin typeface="Consolas"/>
+                <a:cs typeface="Consolas"/>
+              </a:rPr>
+              <a:t>ERROR_CODE</a:t>
             </a:r>
           </a:p>
         </p:txBody>
@@ -9912,7 +11653,64 @@
                 </a:solidFill>
                 <a:latin typeface="맑은 고딕"/>
               </a:rPr>
-              <a:t>•  `MRP0` `APPLYING_LOG` → **`WAIT_FOR_LOG`**, 시퀀스 75</a:t>
+              <a:t>•  </a:t>
+            </a:r>
+            <a:r>
+              <a:rPr sz="1700" b="0">
+                <a:solidFill>
+                  <a:srgbClr val="222222"/>
+                </a:solidFill>
+                <a:latin typeface="Consolas"/>
+                <a:cs typeface="Consolas"/>
+              </a:rPr>
+              <a:t>MRP0</a:t>
+            </a:r>
+            <a:r>
+              <a:rPr sz="1700" b="0">
+                <a:solidFill>
+                  <a:srgbClr val="222222"/>
+                </a:solidFill>
+                <a:latin typeface="맑은 고딕"/>
+              </a:rPr>
+              <a:t> </a:t>
+            </a:r>
+            <a:r>
+              <a:rPr sz="1700" b="0">
+                <a:solidFill>
+                  <a:srgbClr val="222222"/>
+                </a:solidFill>
+                <a:latin typeface="Consolas"/>
+                <a:cs typeface="Consolas"/>
+              </a:rPr>
+              <a:t>APPLYING_LOG</a:t>
+            </a:r>
+            <a:r>
+              <a:rPr sz="1700" b="0">
+                <a:solidFill>
+                  <a:srgbClr val="222222"/>
+                </a:solidFill>
+                <a:latin typeface="맑은 고딕"/>
+              </a:rPr>
+              <a:t> → </a:t>
+            </a:r>
+            <a:r>
+              <a:rPr sz="1700" b="1">
+                <a:solidFill>
+                  <a:srgbClr val="222222"/>
+                </a:solidFill>
+                <a:latin typeface="Consolas"/>
+                <a:cs typeface="Consolas"/>
+              </a:rPr>
+              <a:t>WAIT_FOR_LOG</a:t>
+            </a:r>
+            <a:r>
+              <a:rPr sz="1700" b="0">
+                <a:solidFill>
+                  <a:srgbClr val="222222"/>
+                </a:solidFill>
+                <a:latin typeface="맑은 고딕"/>
+              </a:rPr>
+              <a:t>, 시퀀스 75</a:t>
             </a:r>
           </a:p>
           <a:p>
@@ -9928,7 +11726,35 @@
                 </a:solidFill>
                 <a:latin typeface="맑은 고딕"/>
               </a:rPr>
-              <a:t>•  `RFS`(LGWR) 가 **사라졌다**</a:t>
+              <a:t>•  </a:t>
+            </a:r>
+            <a:r>
+              <a:rPr sz="1700" b="0">
+                <a:solidFill>
+                  <a:srgbClr val="222222"/>
+                </a:solidFill>
+                <a:latin typeface="Consolas"/>
+                <a:cs typeface="Consolas"/>
+              </a:rPr>
+              <a:t>RFS</a:t>
+            </a:r>
+            <a:r>
+              <a:rPr sz="1700" b="0">
+                <a:solidFill>
+                  <a:srgbClr val="222222"/>
+                </a:solidFill>
+                <a:latin typeface="맑은 고딕"/>
+              </a:rPr>
+              <a:t>(LGWR) 가 </a:t>
+            </a:r>
+            <a:r>
+              <a:rPr sz="1700" b="1">
+                <a:solidFill>
+                  <a:srgbClr val="222222"/>
+                </a:solidFill>
+                <a:latin typeface="맑은 고딕"/>
+              </a:rPr>
+              <a:t>사라졌다</a:t>
             </a:r>
           </a:p>
           <a:p>
@@ -9944,7 +11770,54 @@
                 </a:solidFill>
                 <a:latin typeface="맑은 고딕"/>
               </a:rPr>
-              <a:t>•  `V$STANDBY_LOG` 의 `ACTIVE` **0개**</a:t>
+              <a:t>•  </a:t>
+            </a:r>
+            <a:r>
+              <a:rPr sz="1700" b="0">
+                <a:solidFill>
+                  <a:srgbClr val="222222"/>
+                </a:solidFill>
+                <a:latin typeface="Consolas"/>
+                <a:cs typeface="Consolas"/>
+              </a:rPr>
+              <a:t>V$STANDBY_LOG</a:t>
+            </a:r>
+            <a:r>
+              <a:rPr sz="1700" b="0">
+                <a:solidFill>
+                  <a:srgbClr val="222222"/>
+                </a:solidFill>
+                <a:latin typeface="맑은 고딕"/>
+              </a:rPr>
+              <a:t> 의 </a:t>
+            </a:r>
+            <a:r>
+              <a:rPr sz="1700" b="0">
+                <a:solidFill>
+                  <a:srgbClr val="222222"/>
+                </a:solidFill>
+                <a:latin typeface="Consolas"/>
+                <a:cs typeface="Consolas"/>
+              </a:rPr>
+              <a:t>ACTIVE</a:t>
+            </a:r>
+            <a:r>
+              <a:rPr sz="1700" b="0">
+                <a:solidFill>
+                  <a:srgbClr val="222222"/>
+                </a:solidFill>
+                <a:latin typeface="맑은 고딕"/>
+              </a:rPr>
+              <a:t> </a:t>
+            </a:r>
+            <a:r>
+              <a:rPr sz="1700" b="1">
+                <a:solidFill>
+                  <a:srgbClr val="222222"/>
+                </a:solidFill>
+                <a:latin typeface="맑은 고딕"/>
+              </a:rPr>
+              <a:t>0개</a:t>
             </a:r>
           </a:p>
           <a:p>
@@ -9960,7 +11833,25 @@
                 </a:solidFill>
                 <a:latin typeface="맑은 고딕"/>
               </a:rPr>
-              <a:t>•  두 지연은 **0** — 변하지 않는다</a:t>
+              <a:t>•  두 지연은 </a:t>
+            </a:r>
+            <a:r>
+              <a:rPr sz="1700" b="1">
+                <a:solidFill>
+                  <a:srgbClr val="222222"/>
+                </a:solidFill>
+                <a:latin typeface="맑은 고딕"/>
+              </a:rPr>
+              <a:t>0</a:t>
+            </a:r>
+            <a:r>
+              <a:rPr sz="1700" b="0">
+                <a:solidFill>
+                  <a:srgbClr val="222222"/>
+                </a:solidFill>
+                <a:latin typeface="맑은 고딕"/>
+              </a:rPr>
+              <a:t> — 변하지 않는다</a:t>
             </a:r>
           </a:p>
         </p:txBody>
@@ -10139,7 +12030,54 @@
                 </a:solidFill>
                 <a:latin typeface="맑은 고딕"/>
               </a:rPr>
-              <a:t>•  `SHOW CONFIGURATION` — `WARNING` + ORA-16857 → **문제가 있다**</a:t>
+              <a:t>•  </a:t>
+            </a:r>
+            <a:r>
+              <a:rPr sz="1700" b="0">
+                <a:solidFill>
+                  <a:srgbClr val="222222"/>
+                </a:solidFill>
+                <a:latin typeface="Consolas"/>
+                <a:cs typeface="Consolas"/>
+              </a:rPr>
+              <a:t>SHOW CONFIGURATION</a:t>
+            </a:r>
+            <a:r>
+              <a:rPr sz="1700" b="0">
+                <a:solidFill>
+                  <a:srgbClr val="222222"/>
+                </a:solidFill>
+                <a:latin typeface="맑은 고딕"/>
+              </a:rPr>
+              <a:t> — </a:t>
+            </a:r>
+            <a:r>
+              <a:rPr sz="1700" b="0">
+                <a:solidFill>
+                  <a:srgbClr val="222222"/>
+                </a:solidFill>
+                <a:latin typeface="Consolas"/>
+                <a:cs typeface="Consolas"/>
+              </a:rPr>
+              <a:t>WARNING</a:t>
+            </a:r>
+            <a:r>
+              <a:rPr sz="1700" b="0">
+                <a:solidFill>
+                  <a:srgbClr val="222222"/>
+                </a:solidFill>
+                <a:latin typeface="맑은 고딕"/>
+              </a:rPr>
+              <a:t> + ORA-16857 → </a:t>
+            </a:r>
+            <a:r>
+              <a:rPr sz="1700" b="1">
+                <a:solidFill>
+                  <a:srgbClr val="222222"/>
+                </a:solidFill>
+                <a:latin typeface="맑은 고딕"/>
+              </a:rPr>
+              <a:t>문제가 있다</a:t>
             </a:r>
           </a:p>
           <a:p>
@@ -10155,7 +12093,54 @@
                 </a:solidFill>
                 <a:latin typeface="맑은 고딕"/>
               </a:rPr>
-              <a:t>•  `VALIDATE DATABASE` — `Ready for SW: No` → **전환 불가**</a:t>
+              <a:t>•  </a:t>
+            </a:r>
+            <a:r>
+              <a:rPr sz="1700" b="0">
+                <a:solidFill>
+                  <a:srgbClr val="222222"/>
+                </a:solidFill>
+                <a:latin typeface="Consolas"/>
+                <a:cs typeface="Consolas"/>
+              </a:rPr>
+              <a:t>VALIDATE DATABASE</a:t>
+            </a:r>
+            <a:r>
+              <a:rPr sz="1700" b="0">
+                <a:solidFill>
+                  <a:srgbClr val="222222"/>
+                </a:solidFill>
+                <a:latin typeface="맑은 고딕"/>
+              </a:rPr>
+              <a:t> — </a:t>
+            </a:r>
+            <a:r>
+              <a:rPr sz="1700" b="0">
+                <a:solidFill>
+                  <a:srgbClr val="222222"/>
+                </a:solidFill>
+                <a:latin typeface="Consolas"/>
+                <a:cs typeface="Consolas"/>
+              </a:rPr>
+              <a:t>Ready for SW: No</a:t>
+            </a:r>
+            <a:r>
+              <a:rPr sz="1700" b="0">
+                <a:solidFill>
+                  <a:srgbClr val="222222"/>
+                </a:solidFill>
+                <a:latin typeface="맑은 고딕"/>
+              </a:rPr>
+              <a:t> → </a:t>
+            </a:r>
+            <a:r>
+              <a:rPr sz="1700" b="1">
+                <a:solidFill>
+                  <a:srgbClr val="222222"/>
+                </a:solidFill>
+                <a:latin typeface="맑은 고딕"/>
+              </a:rPr>
+              <a:t>전환 불가</a:t>
             </a:r>
           </a:p>
           <a:p>
@@ -10171,7 +12156,72 @@
                 </a:solidFill>
                 <a:latin typeface="맑은 고딕"/>
               </a:rPr>
-              <a:t>•  `V$ARCHIVE_DEST` — `ERROR` + **ORA-12541** → **왜**</a:t>
+              <a:t>•  </a:t>
+            </a:r>
+            <a:r>
+              <a:rPr sz="1700" b="0">
+                <a:solidFill>
+                  <a:srgbClr val="222222"/>
+                </a:solidFill>
+                <a:latin typeface="Consolas"/>
+                <a:cs typeface="Consolas"/>
+              </a:rPr>
+              <a:t>V$ARCHIVE_DEST</a:t>
+            </a:r>
+            <a:r>
+              <a:rPr sz="1700" b="0">
+                <a:solidFill>
+                  <a:srgbClr val="222222"/>
+                </a:solidFill>
+                <a:latin typeface="맑은 고딕"/>
+              </a:rPr>
+              <a:t> — </a:t>
+            </a:r>
+            <a:r>
+              <a:rPr sz="1700" b="0">
+                <a:solidFill>
+                  <a:srgbClr val="222222"/>
+                </a:solidFill>
+                <a:latin typeface="Consolas"/>
+                <a:cs typeface="Consolas"/>
+              </a:rPr>
+              <a:t>ERROR</a:t>
+            </a:r>
+            <a:r>
+              <a:rPr sz="1700" b="0">
+                <a:solidFill>
+                  <a:srgbClr val="222222"/>
+                </a:solidFill>
+                <a:latin typeface="맑은 고딕"/>
+              </a:rPr>
+              <a:t> + </a:t>
+            </a:r>
+            <a:r>
+              <a:rPr sz="1700" b="1">
+                <a:solidFill>
+                  <a:srgbClr val="222222"/>
+                </a:solidFill>
+                <a:latin typeface="맑은 고딕"/>
+              </a:rPr>
+              <a:t>ORA-12541</a:t>
+            </a:r>
+            <a:r>
+              <a:rPr sz="1700" b="0">
+                <a:solidFill>
+                  <a:srgbClr val="222222"/>
+                </a:solidFill>
+                <a:latin typeface="맑은 고딕"/>
+              </a:rPr>
+              <a:t> → </a:t>
+            </a:r>
+            <a:r>
+              <a:rPr sz="1700" b="1">
+                <a:solidFill>
+                  <a:srgbClr val="222222"/>
+                </a:solidFill>
+                <a:latin typeface="맑은 고딕"/>
+              </a:rPr>
+              <a:t>왜</a:t>
             </a:r>
           </a:p>
           <a:p>
@@ -10187,7 +12237,16 @@
                 </a:solidFill>
                 <a:latin typeface="맑은 고딕"/>
               </a:rPr>
-              <a:t>•  알림 로그 — 접속 문자열·프로세스 → **어디를 고칠지**</a:t>
+              <a:t>•  알림 로그 — 접속 문자열·프로세스 → </a:t>
+            </a:r>
+            <a:r>
+              <a:rPr sz="1700" b="1">
+                <a:solidFill>
+                  <a:srgbClr val="222222"/>
+                </a:solidFill>
+                <a:latin typeface="맑은 고딕"/>
+              </a:rPr>
+              <a:t>어디를 고칠지</a:t>
             </a:r>
           </a:p>
         </p:txBody>
@@ -10366,7 +12425,63 @@
                 </a:solidFill>
                 <a:latin typeface="맑은 고딕"/>
               </a:rPr>
-              <a:t>•  **73번** `dest_id=2` `APPLIED=YES` — 끊기기 전에 갔다</a:t>
+              <a:t>•  </a:t>
+            </a:r>
+            <a:r>
+              <a:rPr sz="1700" b="1">
+                <a:solidFill>
+                  <a:srgbClr val="222222"/>
+                </a:solidFill>
+                <a:latin typeface="맑은 고딕"/>
+              </a:rPr>
+              <a:t>73번</a:t>
+            </a:r>
+            <a:r>
+              <a:rPr sz="1700" b="0">
+                <a:solidFill>
+                  <a:srgbClr val="222222"/>
+                </a:solidFill>
+                <a:latin typeface="맑은 고딕"/>
+              </a:rPr>
+              <a:t> </a:t>
+            </a:r>
+            <a:r>
+              <a:rPr sz="1700" b="0">
+                <a:solidFill>
+                  <a:srgbClr val="222222"/>
+                </a:solidFill>
+                <a:latin typeface="Consolas"/>
+                <a:cs typeface="Consolas"/>
+              </a:rPr>
+              <a:t>dest_id=2</a:t>
+            </a:r>
+            <a:r>
+              <a:rPr sz="1700" b="0">
+                <a:solidFill>
+                  <a:srgbClr val="222222"/>
+                </a:solidFill>
+                <a:latin typeface="맑은 고딕"/>
+              </a:rPr>
+              <a:t> </a:t>
+            </a:r>
+            <a:r>
+              <a:rPr sz="1700" b="0">
+                <a:solidFill>
+                  <a:srgbClr val="222222"/>
+                </a:solidFill>
+                <a:latin typeface="Consolas"/>
+                <a:cs typeface="Consolas"/>
+              </a:rPr>
+              <a:t>APPLIED=YES</a:t>
+            </a:r>
+            <a:r>
+              <a:rPr sz="1700" b="0">
+                <a:solidFill>
+                  <a:srgbClr val="222222"/>
+                </a:solidFill>
+                <a:latin typeface="맑은 고딕"/>
+              </a:rPr>
+              <a:t> — 끊기기 전에 갔다</a:t>
             </a:r>
           </a:p>
           <a:p>
@@ -10382,7 +12497,44 @@
                 </a:solidFill>
                 <a:latin typeface="맑은 고딕"/>
               </a:rPr>
-              <a:t>•  **74번** 행은 있는데 `NO` — 등록됐지만 가지 못했다</a:t>
+              <a:t>•  </a:t>
+            </a:r>
+            <a:r>
+              <a:rPr sz="1700" b="1">
+                <a:solidFill>
+                  <a:srgbClr val="222222"/>
+                </a:solidFill>
+                <a:latin typeface="맑은 고딕"/>
+              </a:rPr>
+              <a:t>74번</a:t>
+            </a:r>
+            <a:r>
+              <a:rPr sz="1700" b="0">
+                <a:solidFill>
+                  <a:srgbClr val="222222"/>
+                </a:solidFill>
+                <a:latin typeface="맑은 고딕"/>
+              </a:rPr>
+              <a:t> 행은 있는데 </a:t>
+            </a:r>
+            <a:r>
+              <a:rPr sz="1700" b="0">
+                <a:solidFill>
+                  <a:srgbClr val="222222"/>
+                </a:solidFill>
+                <a:latin typeface="Consolas"/>
+                <a:cs typeface="Consolas"/>
+              </a:rPr>
+              <a:t>NO</a:t>
+            </a:r>
+            <a:r>
+              <a:rPr sz="1700" b="0">
+                <a:solidFill>
+                  <a:srgbClr val="222222"/>
+                </a:solidFill>
+                <a:latin typeface="맑은 고딕"/>
+              </a:rPr>
+              <a:t> — 등록됐지만 가지 못했다</a:t>
             </a:r>
           </a:p>
           <a:p>
@@ -10398,7 +12550,53 @@
                 </a:solidFill>
                 <a:latin typeface="맑은 고딕"/>
               </a:rPr>
-              <a:t>•  **75번** `dest_id=2` **행 자체가 없다**</a:t>
+              <a:t>•  </a:t>
+            </a:r>
+            <a:r>
+              <a:rPr sz="1700" b="1">
+                <a:solidFill>
+                  <a:srgbClr val="222222"/>
+                </a:solidFill>
+                <a:latin typeface="맑은 고딕"/>
+              </a:rPr>
+              <a:t>75번</a:t>
+            </a:r>
+            <a:r>
+              <a:rPr sz="1700" b="0">
+                <a:solidFill>
+                  <a:srgbClr val="222222"/>
+                </a:solidFill>
+                <a:latin typeface="맑은 고딕"/>
+              </a:rPr>
+              <a:t> </a:t>
+            </a:r>
+            <a:r>
+              <a:rPr sz="1700" b="0">
+                <a:solidFill>
+                  <a:srgbClr val="222222"/>
+                </a:solidFill>
+                <a:latin typeface="Consolas"/>
+                <a:cs typeface="Consolas"/>
+              </a:rPr>
+              <a:t>dest_id=2</a:t>
+            </a:r>
+            <a:r>
+              <a:rPr sz="1700" b="0">
+                <a:solidFill>
+                  <a:srgbClr val="222222"/>
+                </a:solidFill>
+                <a:latin typeface="맑은 고딕"/>
+              </a:rPr>
+              <a:t> </a:t>
+            </a:r>
+            <a:r>
+              <a:rPr sz="1700" b="1">
+                <a:solidFill>
+                  <a:srgbClr val="222222"/>
+                </a:solidFill>
+                <a:latin typeface="맑은 고딕"/>
+              </a:rPr>
+              <a:t>행 자체가 없다</a:t>
             </a:r>
           </a:p>
           <a:p>
@@ -10414,7 +12612,35 @@
                 </a:solidFill>
                 <a:latin typeface="맑은 고딕"/>
               </a:rPr>
-              <a:t>•  `V$ARCHIVE_GAP` 은 **비어 있다**</a:t>
+              <a:t>•  </a:t>
+            </a:r>
+            <a:r>
+              <a:rPr sz="1700" b="0">
+                <a:solidFill>
+                  <a:srgbClr val="222222"/>
+                </a:solidFill>
+                <a:latin typeface="Consolas"/>
+                <a:cs typeface="Consolas"/>
+              </a:rPr>
+              <a:t>V$ARCHIVE_GAP</a:t>
+            </a:r>
+            <a:r>
+              <a:rPr sz="1700" b="0">
+                <a:solidFill>
+                  <a:srgbClr val="222222"/>
+                </a:solidFill>
+                <a:latin typeface="맑은 고딕"/>
+              </a:rPr>
+              <a:t> 은 </a:t>
+            </a:r>
+            <a:r>
+              <a:rPr sz="1700" b="1">
+                <a:solidFill>
+                  <a:srgbClr val="222222"/>
+                </a:solidFill>
+                <a:latin typeface="맑은 고딕"/>
+              </a:rPr>
+              <a:t>비어 있다</a:t>
             </a:r>
           </a:p>
         </p:txBody>
@@ -10593,7 +12819,35 @@
                 </a:solidFill>
                 <a:latin typeface="맑은 고딕"/>
               </a:rPr>
-              <a:t>•  `lsnrctl start` 후 70·120·170·220초 — **계속 ORA-12541**</a:t>
+              <a:t>•  </a:t>
+            </a:r>
+            <a:r>
+              <a:rPr sz="1700" b="0">
+                <a:solidFill>
+                  <a:srgbClr val="222222"/>
+                </a:solidFill>
+                <a:latin typeface="Consolas"/>
+                <a:cs typeface="Consolas"/>
+              </a:rPr>
+              <a:t>lsnrctl start</a:t>
+            </a:r>
+            <a:r>
+              <a:rPr sz="1700" b="0">
+                <a:solidFill>
+                  <a:srgbClr val="222222"/>
+                </a:solidFill>
+                <a:latin typeface="맑은 고딕"/>
+              </a:rPr>
+              <a:t> 후 70·120·170·220초 — </a:t>
+            </a:r>
+            <a:r>
+              <a:rPr sz="1700" b="1">
+                <a:solidFill>
+                  <a:srgbClr val="222222"/>
+                </a:solidFill>
+                <a:latin typeface="맑은 고딕"/>
+              </a:rPr>
+              <a:t>계속 ORA-12541</a:t>
             </a:r>
           </a:p>
           <a:p>
@@ -10609,7 +12863,26 @@
                 </a:solidFill>
                 <a:latin typeface="맑은 고딕"/>
               </a:rPr>
-              <a:t>•  **270초에 `VALID`**</a:t>
+              <a:t>•  </a:t>
+            </a:r>
+            <a:r>
+              <a:rPr sz="1700" b="1">
+                <a:solidFill>
+                  <a:srgbClr val="222222"/>
+                </a:solidFill>
+                <a:latin typeface="맑은 고딕"/>
+              </a:rPr>
+              <a:t>270초에 </a:t>
+            </a:r>
+            <a:r>
+              <a:rPr sz="1700" b="1">
+                <a:solidFill>
+                  <a:srgbClr val="222222"/>
+                </a:solidFill>
+                <a:latin typeface="Consolas"/>
+                <a:cs typeface="Consolas"/>
+              </a:rPr>
+              <a:t>VALID</a:t>
             </a:r>
           </a:p>
           <a:p>
@@ -10641,7 +12914,16 @@
                 </a:solidFill>
                 <a:latin typeface="맑은 고딕"/>
               </a:rPr>
-              <a:t>•  여기서 **다른 문제라고 오판하기 쉽다**</a:t>
+              <a:t>•  여기서 </a:t>
+            </a:r>
+            <a:r>
+              <a:rPr sz="1700" b="1">
+                <a:solidFill>
+                  <a:srgbClr val="222222"/>
+                </a:solidFill>
+                <a:latin typeface="맑은 고딕"/>
+              </a:rPr>
+              <a:t>다른 문제라고 오판하기 쉽다</a:t>
             </a:r>
           </a:p>
         </p:txBody>
@@ -10820,7 +13102,35 @@
                 </a:solidFill>
                 <a:latin typeface="맑은 고딕"/>
               </a:rPr>
-              <a:t>•  전송 재개 직후 `SHOW CONFIGURATION` 이 **ERROR**</a:t>
+              <a:t>•  전송 재개 직후 </a:t>
+            </a:r>
+            <a:r>
+              <a:rPr sz="1700" b="0">
+                <a:solidFill>
+                  <a:srgbClr val="222222"/>
+                </a:solidFill>
+                <a:latin typeface="Consolas"/>
+                <a:cs typeface="Consolas"/>
+              </a:rPr>
+              <a:t>SHOW CONFIGURATION</a:t>
+            </a:r>
+            <a:r>
+              <a:rPr sz="1700" b="0">
+                <a:solidFill>
+                  <a:srgbClr val="222222"/>
+                </a:solidFill>
+                <a:latin typeface="맑은 고딕"/>
+              </a:rPr>
+              <a:t> 이 </a:t>
+            </a:r>
+            <a:r>
+              <a:rPr sz="1700" b="1">
+                <a:solidFill>
+                  <a:srgbClr val="222222"/>
+                </a:solidFill>
+                <a:latin typeface="맑은 고딕"/>
+              </a:rPr>
+              <a:t>ERROR</a:t>
             </a:r>
           </a:p>
           <a:p>
@@ -10836,7 +13146,26 @@
                 </a:solidFill>
                 <a:latin typeface="맑은 고딕"/>
               </a:rPr>
-              <a:t>•  새로 `ORA-16778` 까지 붙었다</a:t>
+              <a:t>•  새로 </a:t>
+            </a:r>
+            <a:r>
+              <a:rPr sz="1700" b="0">
+                <a:solidFill>
+                  <a:srgbClr val="222222"/>
+                </a:solidFill>
+                <a:latin typeface="Consolas"/>
+                <a:cs typeface="Consolas"/>
+              </a:rPr>
+              <a:t>ORA-16778</a:t>
+            </a:r>
+            <a:r>
+              <a:rPr sz="1700" b="0">
+                <a:solidFill>
+                  <a:srgbClr val="222222"/>
+                </a:solidFill>
+                <a:latin typeface="맑은 고딕"/>
+              </a:rPr>
+              <a:t> 까지 붙었다</a:t>
             </a:r>
           </a:p>
           <a:p>
@@ -10852,7 +13181,17 @@
                 </a:solidFill>
                 <a:latin typeface="맑은 고딕"/>
               </a:rPr>
-              <a:t>•  같은 시점에 SQL 뷰는 이미 **`VALID`**</a:t>
+              <a:t>•  같은 시점에 SQL 뷰는 이미 </a:t>
+            </a:r>
+            <a:r>
+              <a:rPr sz="1700" b="1">
+                <a:solidFill>
+                  <a:srgbClr val="222222"/>
+                </a:solidFill>
+                <a:latin typeface="Consolas"/>
+                <a:cs typeface="Consolas"/>
+              </a:rPr>
+              <a:t>VALID</a:t>
             </a:r>
           </a:p>
           <a:p>
@@ -10868,7 +13207,17 @@
                 </a:solidFill>
                 <a:latin typeface="맑은 고딕"/>
               </a:rPr>
-              <a:t>•  잠시 뒤 다시 조회 → **`SUCCESS`**</a:t>
+              <a:t>•  잠시 뒤 다시 조회 → </a:t>
+            </a:r>
+            <a:r>
+              <a:rPr sz="1700" b="1">
+                <a:solidFill>
+                  <a:srgbClr val="222222"/>
+                </a:solidFill>
+                <a:latin typeface="Consolas"/>
+                <a:cs typeface="Consolas"/>
+              </a:rPr>
+              <a:t>SUCCESS</a:t>
             </a:r>
           </a:p>
         </p:txBody>
@@ -11506,7 +13855,25 @@
                 </a:solidFill>
                 <a:latin typeface="맑은 고딕"/>
               </a:rPr>
-              <a:t>•  기본 **0**. 값을 더해 조합한다</a:t>
+              <a:t>•  기본 </a:t>
+            </a:r>
+            <a:r>
+              <a:rPr sz="1700" b="1">
+                <a:solidFill>
+                  <a:srgbClr val="222222"/>
+                </a:solidFill>
+                <a:latin typeface="맑은 고딕"/>
+              </a:rPr>
+              <a:t>0</a:t>
+            </a:r>
+            <a:r>
+              <a:rPr sz="1700" b="0">
+                <a:solidFill>
+                  <a:srgbClr val="222222"/>
+                </a:solidFill>
+                <a:latin typeface="맑은 고딕"/>
+              </a:rPr>
+              <a:t>. 값을 더해 조합한다</a:t>
             </a:r>
           </a:p>
           <a:p>
@@ -11522,7 +13889,54 @@
                 </a:solidFill>
                 <a:latin typeface="맑은 고딕"/>
               </a:rPr>
-              <a:t>•  `4`(목적지 상태) + `8`(목적지 활동) = **12**</a:t>
+              <a:t>•  </a:t>
+            </a:r>
+            <a:r>
+              <a:rPr sz="1700" b="0">
+                <a:solidFill>
+                  <a:srgbClr val="222222"/>
+                </a:solidFill>
+                <a:latin typeface="Consolas"/>
+                <a:cs typeface="Consolas"/>
+              </a:rPr>
+              <a:t>4</a:t>
+            </a:r>
+            <a:r>
+              <a:rPr sz="1700" b="0">
+                <a:solidFill>
+                  <a:srgbClr val="222222"/>
+                </a:solidFill>
+                <a:latin typeface="맑은 고딕"/>
+              </a:rPr>
+              <a:t>(목적지 상태) + </a:t>
+            </a:r>
+            <a:r>
+              <a:rPr sz="1700" b="0">
+                <a:solidFill>
+                  <a:srgbClr val="222222"/>
+                </a:solidFill>
+                <a:latin typeface="Consolas"/>
+                <a:cs typeface="Consolas"/>
+              </a:rPr>
+              <a:t>8</a:t>
+            </a:r>
+            <a:r>
+              <a:rPr sz="1700" b="0">
+                <a:solidFill>
+                  <a:srgbClr val="222222"/>
+                </a:solidFill>
+                <a:latin typeface="맑은 고딕"/>
+              </a:rPr>
+              <a:t>(목적지 활동) = </a:t>
+            </a:r>
+            <a:r>
+              <a:rPr sz="1700" b="1">
+                <a:solidFill>
+                  <a:srgbClr val="222222"/>
+                </a:solidFill>
+                <a:latin typeface="맑은 고딕"/>
+              </a:rPr>
+              <a:t>12</a:t>
             </a:r>
           </a:p>
           <a:p>
@@ -11538,7 +13952,26 @@
                 </a:solidFill>
                 <a:latin typeface="맑은 고딕"/>
               </a:rPr>
-              <a:t>•  동적이지만 알림 로그에 **`SCOPE=BOTH`** 로 남는다</a:t>
+              <a:t>•  동적이지만 알림 로그에 </a:t>
+            </a:r>
+            <a:r>
+              <a:rPr sz="1700" b="1">
+                <a:solidFill>
+                  <a:srgbClr val="222222"/>
+                </a:solidFill>
+                <a:latin typeface="Consolas"/>
+                <a:cs typeface="Consolas"/>
+              </a:rPr>
+              <a:t>SCOPE=BOTH</a:t>
+            </a:r>
+            <a:r>
+              <a:rPr sz="1700" b="0">
+                <a:solidFill>
+                  <a:srgbClr val="222222"/>
+                </a:solidFill>
+                <a:latin typeface="맑은 고딕"/>
+              </a:rPr>
+              <a:t> 로 남는다</a:t>
             </a:r>
           </a:p>
           <a:p>
@@ -11554,7 +13987,16 @@
                 </a:solidFill>
                 <a:latin typeface="맑은 고딕"/>
               </a:rPr>
-              <a:t>•  잘못된 값은 음수든 문자열이든 **ORA-02017**</a:t>
+              <a:t>•  잘못된 값은 음수든 문자열이든 </a:t>
+            </a:r>
+            <a:r>
+              <a:rPr sz="1700" b="1">
+                <a:solidFill>
+                  <a:srgbClr val="222222"/>
+                </a:solidFill>
+                <a:latin typeface="맑은 고딕"/>
+              </a:rPr>
+              <a:t>ORA-02017</a:t>
             </a:r>
           </a:p>
         </p:txBody>
@@ -11733,7 +14175,17 @@
                 </a:solidFill>
                 <a:latin typeface="맑은 고딕"/>
               </a:rPr>
-              <a:t>•  이름 규칙 `&lt;SID&gt;_&lt;프로세스&gt;_&lt;PID&gt;.trc`</a:t>
+              <a:t>•  이름 규칙 </a:t>
+            </a:r>
+            <a:r>
+              <a:rPr sz="1700" b="0">
+                <a:solidFill>
+                  <a:srgbClr val="222222"/>
+                </a:solidFill>
+                <a:latin typeface="Consolas"/>
+                <a:cs typeface="Consolas"/>
+              </a:rPr>
+              <a:t>&lt;SID&gt;_&lt;프로세스&gt;_&lt;PID&gt;.trc</a:t>
             </a:r>
           </a:p>
           <a:p>
@@ -11749,7 +14201,25 @@
                 </a:solidFill>
                 <a:latin typeface="맑은 고딕"/>
               </a:rPr>
-              <a:t>•  위치는 **ADR 의 trace 디렉터리** (14장 EXPORT 와 같은 곳)</a:t>
+              <a:t>•  위치는 </a:t>
+            </a:r>
+            <a:r>
+              <a:rPr sz="1700" b="1">
+                <a:solidFill>
+                  <a:srgbClr val="222222"/>
+                </a:solidFill>
+                <a:latin typeface="맑은 고딕"/>
+              </a:rPr>
+              <a:t>ADR 의 trace 디렉터리</a:t>
+            </a:r>
+            <a:r>
+              <a:rPr sz="1700" b="0">
+                <a:solidFill>
+                  <a:srgbClr val="222222"/>
+                </a:solidFill>
+                <a:latin typeface="맑은 고딕"/>
+              </a:rPr>
+              <a:t> (14장 EXPORT 와 같은 곳)</a:t>
             </a:r>
           </a:p>
           <a:p>
@@ -11765,7 +14235,54 @@
                 </a:solidFill>
                 <a:latin typeface="맑은 고딕"/>
               </a:rPr>
-              <a:t>•  `ARCn` — 아카이브 전송·FAL / `TTnn` — **실시간 리두 전송**</a:t>
+              <a:t>•  </a:t>
+            </a:r>
+            <a:r>
+              <a:rPr sz="1700" b="0">
+                <a:solidFill>
+                  <a:srgbClr val="222222"/>
+                </a:solidFill>
+                <a:latin typeface="Consolas"/>
+                <a:cs typeface="Consolas"/>
+              </a:rPr>
+              <a:t>ARCn</a:t>
+            </a:r>
+            <a:r>
+              <a:rPr sz="1700" b="0">
+                <a:solidFill>
+                  <a:srgbClr val="222222"/>
+                </a:solidFill>
+                <a:latin typeface="맑은 고딕"/>
+              </a:rPr>
+              <a:t> — 아카이브 전송·FAL / </a:t>
+            </a:r>
+            <a:r>
+              <a:rPr sz="1700" b="0">
+                <a:solidFill>
+                  <a:srgbClr val="222222"/>
+                </a:solidFill>
+                <a:latin typeface="Consolas"/>
+                <a:cs typeface="Consolas"/>
+              </a:rPr>
+              <a:t>TTnn</a:t>
+            </a:r>
+            <a:r>
+              <a:rPr sz="1700" b="0">
+                <a:solidFill>
+                  <a:srgbClr val="222222"/>
+                </a:solidFill>
+                <a:latin typeface="맑은 고딕"/>
+              </a:rPr>
+              <a:t> — </a:t>
+            </a:r>
+            <a:r>
+              <a:rPr sz="1700" b="1">
+                <a:solidFill>
+                  <a:srgbClr val="222222"/>
+                </a:solidFill>
+                <a:latin typeface="맑은 고딕"/>
+              </a:rPr>
+              <a:t>실시간 리두 전송</a:t>
             </a:r>
           </a:p>
           <a:p>
@@ -11781,7 +14298,44 @@
                 </a:solidFill>
                 <a:latin typeface="맑은 고딕"/>
               </a:rPr>
-              <a:t>•  실측 `chicago_tt04_7487.trc` = **664KB** (arc0 은 30KB)</a:t>
+              <a:t>•  실측 </a:t>
+            </a:r>
+            <a:r>
+              <a:rPr sz="1700" b="0">
+                <a:solidFill>
+                  <a:srgbClr val="222222"/>
+                </a:solidFill>
+                <a:latin typeface="Consolas"/>
+                <a:cs typeface="Consolas"/>
+              </a:rPr>
+              <a:t>chicago_tt04_7487.trc</a:t>
+            </a:r>
+            <a:r>
+              <a:rPr sz="1700" b="0">
+                <a:solidFill>
+                  <a:srgbClr val="222222"/>
+                </a:solidFill>
+                <a:latin typeface="맑은 고딕"/>
+              </a:rPr>
+              <a:t> = </a:t>
+            </a:r>
+            <a:r>
+              <a:rPr sz="1700" b="1">
+                <a:solidFill>
+                  <a:srgbClr val="222222"/>
+                </a:solidFill>
+                <a:latin typeface="맑은 고딕"/>
+              </a:rPr>
+              <a:t>664KB</a:t>
+            </a:r>
+            <a:r>
+              <a:rPr sz="1700" b="0">
+                <a:solidFill>
+                  <a:srgbClr val="222222"/>
+                </a:solidFill>
+                <a:latin typeface="맑은 고딕"/>
+              </a:rPr>
+              <a:t> (arc0 은 30KB)</a:t>
             </a:r>
           </a:p>
         </p:txBody>
@@ -11960,7 +14514,26 @@
                 </a:solidFill>
                 <a:latin typeface="맑은 고딕"/>
               </a:rPr>
-              <a:t>•  `Acquiring LGWR NS Write latch` — 전송이 일어나고 있다</a:t>
+              <a:t>•  </a:t>
+            </a:r>
+            <a:r>
+              <a:rPr sz="1700" b="0">
+                <a:solidFill>
+                  <a:srgbClr val="222222"/>
+                </a:solidFill>
+                <a:latin typeface="Consolas"/>
+                <a:cs typeface="Consolas"/>
+              </a:rPr>
+              <a:t>Acquiring LGWR NS Write latch</a:t>
+            </a:r>
+            <a:r>
+              <a:rPr sz="1700" b="0">
+                <a:solidFill>
+                  <a:srgbClr val="222222"/>
+                </a:solidFill>
+                <a:latin typeface="맑은 고딕"/>
+              </a:rPr>
+              <a:t> — 전송이 일어나고 있다</a:t>
             </a:r>
           </a:p>
           <a:p>
@@ -11976,7 +14549,35 @@
                 </a:solidFill>
                 <a:latin typeface="맑은 고딕"/>
               </a:rPr>
-              <a:t>•  `Sleeping for 100 centi-second(s)` — **한가하다**</a:t>
+              <a:t>•  </a:t>
+            </a:r>
+            <a:r>
+              <a:rPr sz="1700" b="0">
+                <a:solidFill>
+                  <a:srgbClr val="222222"/>
+                </a:solidFill>
+                <a:latin typeface="Consolas"/>
+                <a:cs typeface="Consolas"/>
+              </a:rPr>
+              <a:t>Sleeping for 100 centi-second(s)</a:t>
+            </a:r>
+            <a:r>
+              <a:rPr sz="1700" b="0">
+                <a:solidFill>
+                  <a:srgbClr val="222222"/>
+                </a:solidFill>
+                <a:latin typeface="맑은 고딕"/>
+              </a:rPr>
+              <a:t> — </a:t>
+            </a:r>
+            <a:r>
+              <a:rPr sz="1700" b="1">
+                <a:solidFill>
+                  <a:srgbClr val="222222"/>
+                </a:solidFill>
+                <a:latin typeface="맑은 고딕"/>
+              </a:rPr>
+              <a:t>한가하다</a:t>
             </a:r>
           </a:p>
           <a:p>
@@ -11992,7 +14593,26 @@
                 </a:solidFill>
                 <a:latin typeface="맑은 고딕"/>
               </a:rPr>
-              <a:t>•  `krss_find_work: No work found` — 아카이버는 할 일이 없다</a:t>
+              <a:t>•  </a:t>
+            </a:r>
+            <a:r>
+              <a:rPr sz="1700" b="0">
+                <a:solidFill>
+                  <a:srgbClr val="222222"/>
+                </a:solidFill>
+                <a:latin typeface="Consolas"/>
+                <a:cs typeface="Consolas"/>
+              </a:rPr>
+              <a:t>krss_find_work: No work found</a:t>
+            </a:r>
+            <a:r>
+              <a:rPr sz="1700" b="0">
+                <a:solidFill>
+                  <a:srgbClr val="222222"/>
+                </a:solidFill>
+                <a:latin typeface="맑은 고딕"/>
+              </a:rPr>
+              <a:t> — 아카이버는 할 일이 없다</a:t>
             </a:r>
           </a:p>
           <a:p>
@@ -12008,7 +14628,35 @@
                 </a:solidFill>
                 <a:latin typeface="맑은 고딕"/>
               </a:rPr>
-              <a:t>•  `krsu.c:10213` 같은 것은 **해석 대상이 아니다**</a:t>
+              <a:t>•  </a:t>
+            </a:r>
+            <a:r>
+              <a:rPr sz="1700" b="0">
+                <a:solidFill>
+                  <a:srgbClr val="222222"/>
+                </a:solidFill>
+                <a:latin typeface="Consolas"/>
+                <a:cs typeface="Consolas"/>
+              </a:rPr>
+              <a:t>krsu.c:10213</a:t>
+            </a:r>
+            <a:r>
+              <a:rPr sz="1700" b="0">
+                <a:solidFill>
+                  <a:srgbClr val="222222"/>
+                </a:solidFill>
+                <a:latin typeface="맑은 고딕"/>
+              </a:rPr>
+              <a:t> 같은 것은 </a:t>
+            </a:r>
+            <a:r>
+              <a:rPr sz="1700" b="1">
+                <a:solidFill>
+                  <a:srgbClr val="222222"/>
+                </a:solidFill>
+                <a:latin typeface="맑은 고딕"/>
+              </a:rPr>
+              <a:t>해석 대상이 아니다</a:t>
             </a:r>
           </a:p>
         </p:txBody>
@@ -12426,7 +15074,83 @@
                 </a:solidFill>
                 <a:latin typeface="맑은 고딕"/>
               </a:rPr>
-              <a:t>•  `V$MANAGED_STANDBY` — `ARCH` 4, `DGRD` 2. **`MRP0` 이 없다**</a:t>
+              <a:t>•  </a:t>
+            </a:r>
+            <a:r>
+              <a:rPr sz="1700" b="0">
+                <a:solidFill>
+                  <a:srgbClr val="222222"/>
+                </a:solidFill>
+                <a:latin typeface="Consolas"/>
+                <a:cs typeface="Consolas"/>
+              </a:rPr>
+              <a:t>V$MANAGED_STANDBY</a:t>
+            </a:r>
+            <a:r>
+              <a:rPr sz="1700" b="0">
+                <a:solidFill>
+                  <a:srgbClr val="222222"/>
+                </a:solidFill>
+                <a:latin typeface="맑은 고딕"/>
+              </a:rPr>
+              <a:t> — </a:t>
+            </a:r>
+            <a:r>
+              <a:rPr sz="1700" b="0">
+                <a:solidFill>
+                  <a:srgbClr val="222222"/>
+                </a:solidFill>
+                <a:latin typeface="Consolas"/>
+                <a:cs typeface="Consolas"/>
+              </a:rPr>
+              <a:t>ARCH</a:t>
+            </a:r>
+            <a:r>
+              <a:rPr sz="1700" b="0">
+                <a:solidFill>
+                  <a:srgbClr val="222222"/>
+                </a:solidFill>
+                <a:latin typeface="맑은 고딕"/>
+              </a:rPr>
+              <a:t> 4, </a:t>
+            </a:r>
+            <a:r>
+              <a:rPr sz="1700" b="0">
+                <a:solidFill>
+                  <a:srgbClr val="222222"/>
+                </a:solidFill>
+                <a:latin typeface="Consolas"/>
+                <a:cs typeface="Consolas"/>
+              </a:rPr>
+              <a:t>DGRD</a:t>
+            </a:r>
+            <a:r>
+              <a:rPr sz="1700" b="0">
+                <a:solidFill>
+                  <a:srgbClr val="222222"/>
+                </a:solidFill>
+                <a:latin typeface="맑은 고딕"/>
+              </a:rPr>
+              <a:t> 2. </a:t>
+            </a:r>
+            <a:r>
+              <a:rPr sz="1700" b="1">
+                <a:solidFill>
+                  <a:srgbClr val="222222"/>
+                </a:solidFill>
+                <a:latin typeface="Consolas"/>
+                <a:cs typeface="Consolas"/>
+              </a:rPr>
+              <a:t>MRP0</a:t>
+            </a:r>
+            <a:r>
+              <a:rPr sz="1700" b="1">
+                <a:solidFill>
+                  <a:srgbClr val="222222"/>
+                </a:solidFill>
+                <a:latin typeface="맑은 고딕"/>
+              </a:rPr>
+              <a:t> 이 없다</a:t>
             </a:r>
           </a:p>
           <a:p>
@@ -12442,7 +15166,36 @@
                 </a:solidFill>
                 <a:latin typeface="맑은 고딕"/>
               </a:rPr>
-              <a:t>•  `V$DATAGUARD_STATS` — **`no rows selected`**</a:t>
+              <a:t>•  </a:t>
+            </a:r>
+            <a:r>
+              <a:rPr sz="1700" b="0">
+                <a:solidFill>
+                  <a:srgbClr val="222222"/>
+                </a:solidFill>
+                <a:latin typeface="Consolas"/>
+                <a:cs typeface="Consolas"/>
+              </a:rPr>
+              <a:t>V$DATAGUARD_STATS</a:t>
+            </a:r>
+            <a:r>
+              <a:rPr sz="1700" b="0">
+                <a:solidFill>
+                  <a:srgbClr val="222222"/>
+                </a:solidFill>
+                <a:latin typeface="맑은 고딕"/>
+              </a:rPr>
+              <a:t> — </a:t>
+            </a:r>
+            <a:r>
+              <a:rPr sz="1700" b="1">
+                <a:solidFill>
+                  <a:srgbClr val="222222"/>
+                </a:solidFill>
+                <a:latin typeface="Consolas"/>
+                <a:cs typeface="Consolas"/>
+              </a:rPr>
+              <a:t>no rows selected</a:t>
             </a:r>
           </a:p>
           <a:p>
@@ -12474,7 +15227,45 @@
                 </a:solidFill>
                 <a:latin typeface="맑은 고딕"/>
               </a:rPr>
-              <a:t>•  대신 `V$LOGSTDBY_STATE` 와 `DBA_LOGSTDBY_PROGRESS` 를 본다</a:t>
+              <a:t>•  대신 </a:t>
+            </a:r>
+            <a:r>
+              <a:rPr sz="1700" b="0">
+                <a:solidFill>
+                  <a:srgbClr val="222222"/>
+                </a:solidFill>
+                <a:latin typeface="Consolas"/>
+                <a:cs typeface="Consolas"/>
+              </a:rPr>
+              <a:t>V$LOGSTDBY_STATE</a:t>
+            </a:r>
+            <a:r>
+              <a:rPr sz="1700" b="0">
+                <a:solidFill>
+                  <a:srgbClr val="222222"/>
+                </a:solidFill>
+                <a:latin typeface="맑은 고딕"/>
+              </a:rPr>
+              <a:t> 와 </a:t>
+            </a:r>
+            <a:r>
+              <a:rPr sz="1700" b="0">
+                <a:solidFill>
+                  <a:srgbClr val="222222"/>
+                </a:solidFill>
+                <a:latin typeface="Consolas"/>
+                <a:cs typeface="Consolas"/>
+              </a:rPr>
+              <a:t>DBA_LOGSTDBY_PROGRESS</a:t>
+            </a:r>
+            <a:r>
+              <a:rPr sz="1700" b="0">
+                <a:solidFill>
+                  <a:srgbClr val="222222"/>
+                </a:solidFill>
+                <a:latin typeface="맑은 고딕"/>
+              </a:rPr>
+              <a:t> 를 본다</a:t>
             </a:r>
           </a:p>
         </p:txBody>
@@ -12653,7 +15444,36 @@
                 </a:solidFill>
                 <a:latin typeface="맑은 고딕"/>
               </a:rPr>
-              <a:t>•  `XIDUSN` 으로 조회하면 **`ORA-00904`**</a:t>
+              <a:t>•  </a:t>
+            </a:r>
+            <a:r>
+              <a:rPr sz="1700" b="0">
+                <a:solidFill>
+                  <a:srgbClr val="222222"/>
+                </a:solidFill>
+                <a:latin typeface="Consolas"/>
+                <a:cs typeface="Consolas"/>
+              </a:rPr>
+              <a:t>XIDUSN</a:t>
+            </a:r>
+            <a:r>
+              <a:rPr sz="1700" b="0">
+                <a:solidFill>
+                  <a:srgbClr val="222222"/>
+                </a:solidFill>
+                <a:latin typeface="맑은 고딕"/>
+              </a:rPr>
+              <a:t> 으로 조회하면 </a:t>
+            </a:r>
+            <a:r>
+              <a:rPr sz="1700" b="1">
+                <a:solidFill>
+                  <a:srgbClr val="222222"/>
+                </a:solidFill>
+                <a:latin typeface="Consolas"/>
+                <a:cs typeface="Consolas"/>
+              </a:rPr>
+              <a:t>ORA-00904</a:t>
             </a:r>
           </a:p>
           <a:p>
@@ -12669,7 +15489,54 @@
                 </a:solidFill>
                 <a:latin typeface="맑은 고딕"/>
               </a:rPr>
-              <a:t>•  실제 열은 전부 **`PRIMARY_` 접두어** — `PRIMARY_XIDUSN` …</a:t>
+              <a:t>•  실제 열은 전부 </a:t>
+            </a:r>
+            <a:r>
+              <a:rPr sz="1700" b="1">
+                <a:solidFill>
+                  <a:srgbClr val="222222"/>
+                </a:solidFill>
+                <a:latin typeface="Consolas"/>
+                <a:cs typeface="Consolas"/>
+              </a:rPr>
+              <a:t>PRIMARY_</a:t>
+            </a:r>
+            <a:r>
+              <a:rPr sz="1700" b="1">
+                <a:solidFill>
+                  <a:srgbClr val="222222"/>
+                </a:solidFill>
+                <a:latin typeface="맑은 고딕"/>
+              </a:rPr>
+              <a:t> 접두어</a:t>
+            </a:r>
+            <a:r>
+              <a:rPr sz="1700" b="0">
+                <a:solidFill>
+                  <a:srgbClr val="222222"/>
+                </a:solidFill>
+                <a:latin typeface="맑은 고딕"/>
+              </a:rPr>
+              <a:t> — </a:t>
+            </a:r>
+            <a:r>
+              <a:rPr sz="1700" b="0">
+                <a:solidFill>
+                  <a:srgbClr val="222222"/>
+                </a:solidFill>
+                <a:latin typeface="Consolas"/>
+                <a:cs typeface="Consolas"/>
+              </a:rPr>
+              <a:t>PRIMARY_XIDUSN</a:t>
+            </a:r>
+            <a:r>
+              <a:rPr sz="1700" b="0">
+                <a:solidFill>
+                  <a:srgbClr val="222222"/>
+                </a:solidFill>
+                <a:latin typeface="맑은 고딕"/>
+              </a:rPr>
+              <a:t> …</a:t>
             </a:r>
           </a:p>
           <a:p>
@@ -12685,7 +15552,54 @@
                 </a:solidFill>
                 <a:latin typeface="맑은 고딕"/>
               </a:rPr>
-              <a:t>•  `SAVEPOINT_SCN` · `COMMIT_SCN` 은 19c 에 **없다**</a:t>
+              <a:t>•  </a:t>
+            </a:r>
+            <a:r>
+              <a:rPr sz="1700" b="0">
+                <a:solidFill>
+                  <a:srgbClr val="222222"/>
+                </a:solidFill>
+                <a:latin typeface="Consolas"/>
+                <a:cs typeface="Consolas"/>
+              </a:rPr>
+              <a:t>SAVEPOINT_SCN</a:t>
+            </a:r>
+            <a:r>
+              <a:rPr sz="1700" b="0">
+                <a:solidFill>
+                  <a:srgbClr val="222222"/>
+                </a:solidFill>
+                <a:latin typeface="맑은 고딕"/>
+              </a:rPr>
+              <a:t> · </a:t>
+            </a:r>
+            <a:r>
+              <a:rPr sz="1700" b="0">
+                <a:solidFill>
+                  <a:srgbClr val="222222"/>
+                </a:solidFill>
+                <a:latin typeface="Consolas"/>
+                <a:cs typeface="Consolas"/>
+              </a:rPr>
+              <a:t>COMMIT_SCN</a:t>
+            </a:r>
+            <a:r>
+              <a:rPr sz="1700" b="0">
+                <a:solidFill>
+                  <a:srgbClr val="222222"/>
+                </a:solidFill>
+                <a:latin typeface="맑은 고딕"/>
+              </a:rPr>
+              <a:t> 은 19c 에 </a:t>
+            </a:r>
+            <a:r>
+              <a:rPr sz="1700" b="1">
+                <a:solidFill>
+                  <a:srgbClr val="222222"/>
+                </a:solidFill>
+                <a:latin typeface="맑은 고딕"/>
+              </a:rPr>
+              <a:t>없다</a:t>
             </a:r>
           </a:p>
           <a:p>
@@ -12701,7 +15615,17 @@
                 </a:solidFill>
                 <a:latin typeface="맑은 고딕"/>
               </a:rPr>
-              <a:t>•  실측 — `XID 9.9.821 | DML | MINING COMPLETE | APPLY NONE | SRC_CON 3`</a:t>
+              <a:t>•  실측 — </a:t>
+            </a:r>
+            <a:r>
+              <a:rPr sz="1700" b="0">
+                <a:solidFill>
+                  <a:srgbClr val="222222"/>
+                </a:solidFill>
+                <a:latin typeface="Consolas"/>
+                <a:cs typeface="Consolas"/>
+              </a:rPr>
+              <a:t>XID 9.9.821 | DML | MINING COMPLETE | APPLY NONE | SRC_CON 3</a:t>
             </a:r>
           </a:p>
         </p:txBody>
@@ -12880,7 +15804,35 @@
                 </a:solidFill>
                 <a:latin typeface="맑은 고딕"/>
               </a:rPr>
-              <a:t>•  적용이 멈추면 `V$LOGSTDBY_TRANSACTION` 은 **비어 버린다**</a:t>
+              <a:t>•  적용이 멈추면 </a:t>
+            </a:r>
+            <a:r>
+              <a:rPr sz="1700" b="0">
+                <a:solidFill>
+                  <a:srgbClr val="222222"/>
+                </a:solidFill>
+                <a:latin typeface="Consolas"/>
+                <a:cs typeface="Consolas"/>
+              </a:rPr>
+              <a:t>V$LOGSTDBY_TRANSACTION</a:t>
+            </a:r>
+            <a:r>
+              <a:rPr sz="1700" b="0">
+                <a:solidFill>
+                  <a:srgbClr val="222222"/>
+                </a:solidFill>
+                <a:latin typeface="맑은 고딕"/>
+              </a:rPr>
+              <a:t> 은 </a:t>
+            </a:r>
+            <a:r>
+              <a:rPr sz="1700" b="1">
+                <a:solidFill>
+                  <a:srgbClr val="222222"/>
+                </a:solidFill>
+                <a:latin typeface="맑은 고딕"/>
+              </a:rPr>
+              <a:t>비어 버린다</a:t>
             </a:r>
           </a:p>
           <a:p>
@@ -12896,7 +15848,36 @@
                 </a:solidFill>
                 <a:latin typeface="맑은 고딕"/>
               </a:rPr>
-              <a:t>•  멈춘 뒤의 XID 는 `DBA_LOGSTDBY_EVENTS` 에 — 열 이름은 `XIDUSN`</a:t>
+              <a:t>•  멈춘 뒤의 XID 는 </a:t>
+            </a:r>
+            <a:r>
+              <a:rPr sz="1700" b="0">
+                <a:solidFill>
+                  <a:srgbClr val="222222"/>
+                </a:solidFill>
+                <a:latin typeface="Consolas"/>
+                <a:cs typeface="Consolas"/>
+              </a:rPr>
+              <a:t>DBA_LOGSTDBY_EVENTS</a:t>
+            </a:r>
+            <a:r>
+              <a:rPr sz="1700" b="0">
+                <a:solidFill>
+                  <a:srgbClr val="222222"/>
+                </a:solidFill>
+                <a:latin typeface="맑은 고딕"/>
+              </a:rPr>
+              <a:t> 에 — 열 이름은 </a:t>
+            </a:r>
+            <a:r>
+              <a:rPr sz="1700" b="0">
+                <a:solidFill>
+                  <a:srgbClr val="222222"/>
+                </a:solidFill>
+                <a:latin typeface="Consolas"/>
+                <a:cs typeface="Consolas"/>
+              </a:rPr>
+              <a:t>XIDUSN</a:t>
             </a:r>
           </a:p>
           <a:p>
@@ -12912,7 +15893,26 @@
                 </a:solidFill>
                 <a:latin typeface="맑은 고딕"/>
               </a:rPr>
-              <a:t>•  실측 오류 **`ORA-26787`** (그 키의 행이 표에 없다)</a:t>
+              <a:t>•  실측 오류 </a:t>
+            </a:r>
+            <a:r>
+              <a:rPr sz="1700" b="1">
+                <a:solidFill>
+                  <a:srgbClr val="222222"/>
+                </a:solidFill>
+                <a:latin typeface="Consolas"/>
+                <a:cs typeface="Consolas"/>
+              </a:rPr>
+              <a:t>ORA-26787</a:t>
+            </a:r>
+            <a:r>
+              <a:rPr sz="1700" b="0">
+                <a:solidFill>
+                  <a:srgbClr val="222222"/>
+                </a:solidFill>
+                <a:latin typeface="맑은 고딕"/>
+              </a:rPr>
+              <a:t> (그 키의 행이 표에 없다)</a:t>
             </a:r>
           </a:p>
           <a:p>
@@ -12928,7 +15928,55 @@
                 </a:solidFill>
                 <a:latin typeface="맑은 고딕"/>
               </a:rPr>
-              <a:t>•  `SKIP_TRANSACTION` — PDB 에서 `ORA-65040`, 정지 상태에서 `ORA-16104`</a:t>
+              <a:t>•  </a:t>
+            </a:r>
+            <a:r>
+              <a:rPr sz="1700" b="0">
+                <a:solidFill>
+                  <a:srgbClr val="222222"/>
+                </a:solidFill>
+                <a:latin typeface="Consolas"/>
+                <a:cs typeface="Consolas"/>
+              </a:rPr>
+              <a:t>SKIP_TRANSACTION</a:t>
+            </a:r>
+            <a:r>
+              <a:rPr sz="1700" b="0">
+                <a:solidFill>
+                  <a:srgbClr val="222222"/>
+                </a:solidFill>
+                <a:latin typeface="맑은 고딕"/>
+              </a:rPr>
+              <a:t> — PDB 에서 </a:t>
+            </a:r>
+            <a:r>
+              <a:rPr sz="1700" b="0">
+                <a:solidFill>
+                  <a:srgbClr val="222222"/>
+                </a:solidFill>
+                <a:latin typeface="Consolas"/>
+                <a:cs typeface="Consolas"/>
+              </a:rPr>
+              <a:t>ORA-65040</a:t>
+            </a:r>
+            <a:r>
+              <a:rPr sz="1700" b="0">
+                <a:solidFill>
+                  <a:srgbClr val="222222"/>
+                </a:solidFill>
+                <a:latin typeface="맑은 고딕"/>
+              </a:rPr>
+              <a:t>, 정지 상태에서 </a:t>
+            </a:r>
+            <a:r>
+              <a:rPr sz="1700" b="0">
+                <a:solidFill>
+                  <a:srgbClr val="222222"/>
+                </a:solidFill>
+                <a:latin typeface="Consolas"/>
+                <a:cs typeface="Consolas"/>
+              </a:rPr>
+              <a:t>ORA-16104</a:t>
             </a:r>
           </a:p>
         </p:txBody>
@@ -13362,7 +16410,16 @@
                 </a:solidFill>
                 <a:latin typeface="맑은 고딕"/>
               </a:rPr>
-              <a:t>•  **① 역할에 따라 다른 것을 본다**</a:t>
+              <a:t>•  </a:t>
+            </a:r>
+            <a:r>
+              <a:rPr sz="1700" b="1">
+                <a:solidFill>
+                  <a:srgbClr val="222222"/>
+                </a:solidFill>
+                <a:latin typeface="맑은 고딕"/>
+              </a:rPr>
+              <a:t>① 역할에 따라 다른 것을 본다</a:t>
             </a:r>
           </a:p>
           <a:p>
@@ -13378,7 +16435,26 @@
                 </a:solidFill>
                 <a:latin typeface="맑은 고딕"/>
               </a:rPr>
-              <a:t>•  ② `count(*)` 로 판정 가능한 숫자를 만든다</a:t>
+              <a:t>•  ② </a:t>
+            </a:r>
+            <a:r>
+              <a:rPr sz="1700" b="0">
+                <a:solidFill>
+                  <a:srgbClr val="222222"/>
+                </a:solidFill>
+                <a:latin typeface="Consolas"/>
+                <a:cs typeface="Consolas"/>
+              </a:rPr>
+              <a:t>count(*)</a:t>
+            </a:r>
+            <a:r>
+              <a:rPr sz="1700" b="0">
+                <a:solidFill>
+                  <a:srgbClr val="222222"/>
+                </a:solidFill>
+                <a:latin typeface="맑은 고딕"/>
+              </a:rPr>
+              <a:t> 로 판정 가능한 숫자를 만든다</a:t>
             </a:r>
           </a:p>
           <a:p>
@@ -13410,7 +16486,44 @@
                 </a:solidFill>
                 <a:latin typeface="맑은 고딕"/>
               </a:rPr>
-              <a:t>•  ④ `V$DATAGUARD_STATUS` 에는 **시간 조건**을 넣는다</a:t>
+              <a:t>•  ④ </a:t>
+            </a:r>
+            <a:r>
+              <a:rPr sz="1700" b="0">
+                <a:solidFill>
+                  <a:srgbClr val="222222"/>
+                </a:solidFill>
+                <a:latin typeface="Consolas"/>
+                <a:cs typeface="Consolas"/>
+              </a:rPr>
+              <a:t>V$DATAGUARD_STATUS</a:t>
+            </a:r>
+            <a:r>
+              <a:rPr sz="1700" b="0">
+                <a:solidFill>
+                  <a:srgbClr val="222222"/>
+                </a:solidFill>
+                <a:latin typeface="맑은 고딕"/>
+              </a:rPr>
+              <a:t> 에는 </a:t>
+            </a:r>
+            <a:r>
+              <a:rPr sz="1700" b="1">
+                <a:solidFill>
+                  <a:srgbClr val="222222"/>
+                </a:solidFill>
+                <a:latin typeface="맑은 고딕"/>
+              </a:rPr>
+              <a:t>시간 조건</a:t>
+            </a:r>
+            <a:r>
+              <a:rPr sz="1700" b="0">
+                <a:solidFill>
+                  <a:srgbClr val="222222"/>
+                </a:solidFill>
+                <a:latin typeface="맑은 고딕"/>
+              </a:rPr>
+              <a:t>을 넣는다</a:t>
             </a:r>
           </a:p>
           <a:p>
@@ -13844,7 +16957,74 @@
                 </a:solidFill>
                 <a:latin typeface="맑은 고딕"/>
               </a:rPr>
-              <a:t>•  Primary — 목적지 `STATUS`, `LOG_ABNORMAL`, `DG_ERR`, `CUR_SEQ`</a:t>
+              <a:t>•  Primary — 목적지 </a:t>
+            </a:r>
+            <a:r>
+              <a:rPr sz="1700" b="0">
+                <a:solidFill>
+                  <a:srgbClr val="222222"/>
+                </a:solidFill>
+                <a:latin typeface="Consolas"/>
+                <a:cs typeface="Consolas"/>
+              </a:rPr>
+              <a:t>STATUS</a:t>
+            </a:r>
+            <a:r>
+              <a:rPr sz="1700" b="0">
+                <a:solidFill>
+                  <a:srgbClr val="222222"/>
+                </a:solidFill>
+                <a:latin typeface="맑은 고딕"/>
+              </a:rPr>
+              <a:t>, </a:t>
+            </a:r>
+            <a:r>
+              <a:rPr sz="1700" b="0">
+                <a:solidFill>
+                  <a:srgbClr val="222222"/>
+                </a:solidFill>
+                <a:latin typeface="Consolas"/>
+                <a:cs typeface="Consolas"/>
+              </a:rPr>
+              <a:t>LOG_ABNORMAL</a:t>
+            </a:r>
+            <a:r>
+              <a:rPr sz="1700" b="0">
+                <a:solidFill>
+                  <a:srgbClr val="222222"/>
+                </a:solidFill>
+                <a:latin typeface="맑은 고딕"/>
+              </a:rPr>
+              <a:t>, </a:t>
+            </a:r>
+            <a:r>
+              <a:rPr sz="1700" b="0">
+                <a:solidFill>
+                  <a:srgbClr val="222222"/>
+                </a:solidFill>
+                <a:latin typeface="Consolas"/>
+                <a:cs typeface="Consolas"/>
+              </a:rPr>
+              <a:t>DG_ERR</a:t>
+            </a:r>
+            <a:r>
+              <a:rPr sz="1700" b="0">
+                <a:solidFill>
+                  <a:srgbClr val="222222"/>
+                </a:solidFill>
+                <a:latin typeface="맑은 고딕"/>
+              </a:rPr>
+              <a:t>, </a:t>
+            </a:r>
+            <a:r>
+              <a:rPr sz="1700" b="0">
+                <a:solidFill>
+                  <a:srgbClr val="222222"/>
+                </a:solidFill>
+                <a:latin typeface="Consolas"/>
+                <a:cs typeface="Consolas"/>
+              </a:rPr>
+              <a:t>CUR_SEQ</a:t>
             </a:r>
           </a:p>
           <a:p>
@@ -13860,7 +17040,55 @@
                 </a:solidFill>
                 <a:latin typeface="맑은 고딕"/>
               </a:rPr>
-              <a:t>•  Standby — `MRP0`, `SEQUENCE#`, `RECOVERY_MODE`</a:t>
+              <a:t>•  Standby — </a:t>
+            </a:r>
+            <a:r>
+              <a:rPr sz="1700" b="0">
+                <a:solidFill>
+                  <a:srgbClr val="222222"/>
+                </a:solidFill>
+                <a:latin typeface="Consolas"/>
+                <a:cs typeface="Consolas"/>
+              </a:rPr>
+              <a:t>MRP0</a:t>
+            </a:r>
+            <a:r>
+              <a:rPr sz="1700" b="0">
+                <a:solidFill>
+                  <a:srgbClr val="222222"/>
+                </a:solidFill>
+                <a:latin typeface="맑은 고딕"/>
+              </a:rPr>
+              <a:t>, </a:t>
+            </a:r>
+            <a:r>
+              <a:rPr sz="1700" b="0">
+                <a:solidFill>
+                  <a:srgbClr val="222222"/>
+                </a:solidFill>
+                <a:latin typeface="Consolas"/>
+                <a:cs typeface="Consolas"/>
+              </a:rPr>
+              <a:t>SEQUENCE#</a:t>
+            </a:r>
+            <a:r>
+              <a:rPr sz="1700" b="0">
+                <a:solidFill>
+                  <a:srgbClr val="222222"/>
+                </a:solidFill>
+                <a:latin typeface="맑은 고딕"/>
+              </a:rPr>
+              <a:t>, </a:t>
+            </a:r>
+            <a:r>
+              <a:rPr sz="1700" b="0">
+                <a:solidFill>
+                  <a:srgbClr val="222222"/>
+                </a:solidFill>
+                <a:latin typeface="Consolas"/>
+                <a:cs typeface="Consolas"/>
+              </a:rPr>
+              <a:t>RECOVERY_MODE</a:t>
             </a:r>
           </a:p>
           <a:p>
@@ -13876,7 +17104,55 @@
                 </a:solidFill>
                 <a:latin typeface="맑은 고딕"/>
               </a:rPr>
-              <a:t>•  Standby — **`SRL_ACTIVE`**, `GAP_CNT`, `DG_ERR`</a:t>
+              <a:t>•  Standby — </a:t>
+            </a:r>
+            <a:r>
+              <a:rPr sz="1700" b="1">
+                <a:solidFill>
+                  <a:srgbClr val="222222"/>
+                </a:solidFill>
+                <a:latin typeface="Consolas"/>
+                <a:cs typeface="Consolas"/>
+              </a:rPr>
+              <a:t>SRL_ACTIVE</a:t>
+            </a:r>
+            <a:r>
+              <a:rPr sz="1700" b="0">
+                <a:solidFill>
+                  <a:srgbClr val="222222"/>
+                </a:solidFill>
+                <a:latin typeface="맑은 고딕"/>
+              </a:rPr>
+              <a:t>, </a:t>
+            </a:r>
+            <a:r>
+              <a:rPr sz="1700" b="0">
+                <a:solidFill>
+                  <a:srgbClr val="222222"/>
+                </a:solidFill>
+                <a:latin typeface="Consolas"/>
+                <a:cs typeface="Consolas"/>
+              </a:rPr>
+              <a:t>GAP_CNT</a:t>
+            </a:r>
+            <a:r>
+              <a:rPr sz="1700" b="0">
+                <a:solidFill>
+                  <a:srgbClr val="222222"/>
+                </a:solidFill>
+                <a:latin typeface="맑은 고딕"/>
+              </a:rPr>
+              <a:t>, </a:t>
+            </a:r>
+            <a:r>
+              <a:rPr sz="1700" b="0">
+                <a:solidFill>
+                  <a:srgbClr val="222222"/>
+                </a:solidFill>
+                <a:latin typeface="Consolas"/>
+                <a:cs typeface="Consolas"/>
+              </a:rPr>
+              <a:t>DG_ERR</a:t>
             </a:r>
           </a:p>
           <a:p>
@@ -13892,7 +17168,53 @@
                 </a:solidFill>
                 <a:latin typeface="맑은 고딕"/>
               </a:rPr>
-              <a:t>•  실측 `DG_ERR` chicago **3**(실습 03 흔적) / boston **0**</a:t>
+              <a:t>•  실측 </a:t>
+            </a:r>
+            <a:r>
+              <a:rPr sz="1700" b="0">
+                <a:solidFill>
+                  <a:srgbClr val="222222"/>
+                </a:solidFill>
+                <a:latin typeface="Consolas"/>
+                <a:cs typeface="Consolas"/>
+              </a:rPr>
+              <a:t>DG_ERR</a:t>
+            </a:r>
+            <a:r>
+              <a:rPr sz="1700" b="0">
+                <a:solidFill>
+                  <a:srgbClr val="222222"/>
+                </a:solidFill>
+                <a:latin typeface="맑은 고딕"/>
+              </a:rPr>
+              <a:t> chicago </a:t>
+            </a:r>
+            <a:r>
+              <a:rPr sz="1700" b="1">
+                <a:solidFill>
+                  <a:srgbClr val="222222"/>
+                </a:solidFill>
+                <a:latin typeface="맑은 고딕"/>
+              </a:rPr>
+              <a:t>3</a:t>
+            </a:r>
+            <a:r>
+              <a:rPr sz="1700" b="0">
+                <a:solidFill>
+                  <a:srgbClr val="222222"/>
+                </a:solidFill>
+                <a:latin typeface="맑은 고딕"/>
+              </a:rPr>
+              <a:t>(실습 03 흔적) / boston </a:t>
+            </a:r>
+            <a:r>
+              <a:rPr sz="1700" b="1">
+                <a:solidFill>
+                  <a:srgbClr val="222222"/>
+                </a:solidFill>
+                <a:latin typeface="맑은 고딕"/>
+              </a:rPr>
+              <a:t>0</a:t>
             </a:r>
           </a:p>
         </p:txBody>
@@ -14071,7 +17393,101 @@
                 </a:solidFill>
                 <a:latin typeface="맑은 고딕"/>
               </a:rPr>
-              <a:t>•  **주 지표** — `SRL_ACTIVE`=1, `MRP0` 존재, 두 `SEQUENCE#` 일치, `STATUS`=VALID</a:t>
+              <a:t>•  </a:t>
+            </a:r>
+            <a:r>
+              <a:rPr sz="1700" b="1">
+                <a:solidFill>
+                  <a:srgbClr val="222222"/>
+                </a:solidFill>
+                <a:latin typeface="맑은 고딕"/>
+              </a:rPr>
+              <a:t>주 지표</a:t>
+            </a:r>
+            <a:r>
+              <a:rPr sz="1700" b="0">
+                <a:solidFill>
+                  <a:srgbClr val="222222"/>
+                </a:solidFill>
+                <a:latin typeface="맑은 고딕"/>
+              </a:rPr>
+              <a:t> — </a:t>
+            </a:r>
+            <a:r>
+              <a:rPr sz="1700" b="0">
+                <a:solidFill>
+                  <a:srgbClr val="222222"/>
+                </a:solidFill>
+                <a:latin typeface="Consolas"/>
+                <a:cs typeface="Consolas"/>
+              </a:rPr>
+              <a:t>SRL_ACTIVE</a:t>
+            </a:r>
+            <a:r>
+              <a:rPr sz="1700" b="0">
+                <a:solidFill>
+                  <a:srgbClr val="222222"/>
+                </a:solidFill>
+                <a:latin typeface="맑은 고딕"/>
+              </a:rPr>
+              <a:t>=1, </a:t>
+            </a:r>
+            <a:r>
+              <a:rPr sz="1700" b="0">
+                <a:solidFill>
+                  <a:srgbClr val="222222"/>
+                </a:solidFill>
+                <a:latin typeface="Consolas"/>
+                <a:cs typeface="Consolas"/>
+              </a:rPr>
+              <a:t>MRP0</a:t>
+            </a:r>
+            <a:r>
+              <a:rPr sz="1700" b="0">
+                <a:solidFill>
+                  <a:srgbClr val="222222"/>
+                </a:solidFill>
+                <a:latin typeface="맑은 고딕"/>
+              </a:rPr>
+              <a:t> 존재, 두 </a:t>
+            </a:r>
+            <a:r>
+              <a:rPr sz="1700" b="0">
+                <a:solidFill>
+                  <a:srgbClr val="222222"/>
+                </a:solidFill>
+                <a:latin typeface="Consolas"/>
+                <a:cs typeface="Consolas"/>
+              </a:rPr>
+              <a:t>SEQUENCE#</a:t>
+            </a:r>
+            <a:r>
+              <a:rPr sz="1700" b="0">
+                <a:solidFill>
+                  <a:srgbClr val="222222"/>
+                </a:solidFill>
+                <a:latin typeface="맑은 고딕"/>
+              </a:rPr>
+              <a:t> 일치, </a:t>
+            </a:r>
+            <a:r>
+              <a:rPr sz="1700" b="0">
+                <a:solidFill>
+                  <a:srgbClr val="222222"/>
+                </a:solidFill>
+                <a:latin typeface="Consolas"/>
+                <a:cs typeface="Consolas"/>
+              </a:rPr>
+              <a:t>STATUS</a:t>
+            </a:r>
+            <a:r>
+              <a:rPr sz="1700" b="0">
+                <a:solidFill>
+                  <a:srgbClr val="222222"/>
+                </a:solidFill>
+                <a:latin typeface="맑은 고딕"/>
+              </a:rPr>
+              <a:t>=VALID</a:t>
             </a:r>
           </a:p>
           <a:p>
@@ -14087,7 +17503,54 @@
                 </a:solidFill>
                 <a:latin typeface="맑은 고딕"/>
               </a:rPr>
-              <a:t>•  **보조 지표** — `transport lag`, `apply lag`</a:t>
+              <a:t>•  </a:t>
+            </a:r>
+            <a:r>
+              <a:rPr sz="1700" b="1">
+                <a:solidFill>
+                  <a:srgbClr val="222222"/>
+                </a:solidFill>
+                <a:latin typeface="맑은 고딕"/>
+              </a:rPr>
+              <a:t>보조 지표</a:t>
+            </a:r>
+            <a:r>
+              <a:rPr sz="1700" b="0">
+                <a:solidFill>
+                  <a:srgbClr val="222222"/>
+                </a:solidFill>
+                <a:latin typeface="맑은 고딕"/>
+              </a:rPr>
+              <a:t> — </a:t>
+            </a:r>
+            <a:r>
+              <a:rPr sz="1700" b="0">
+                <a:solidFill>
+                  <a:srgbClr val="222222"/>
+                </a:solidFill>
+                <a:latin typeface="Consolas"/>
+                <a:cs typeface="Consolas"/>
+              </a:rPr>
+              <a:t>transport lag</a:t>
+            </a:r>
+            <a:r>
+              <a:rPr sz="1700" b="0">
+                <a:solidFill>
+                  <a:srgbClr val="222222"/>
+                </a:solidFill>
+                <a:latin typeface="맑은 고딕"/>
+              </a:rPr>
+              <a:t>, </a:t>
+            </a:r>
+            <a:r>
+              <a:rPr sz="1700" b="0">
+                <a:solidFill>
+                  <a:srgbClr val="222222"/>
+                </a:solidFill>
+                <a:latin typeface="Consolas"/>
+                <a:cs typeface="Consolas"/>
+              </a:rPr>
+              <a:t>apply lag</a:t>
             </a:r>
           </a:p>
           <a:p>
@@ -14103,7 +17566,25 @@
                 </a:solidFill>
                 <a:latin typeface="맑은 고딕"/>
               </a:rPr>
-              <a:t>•  지연은 **두 번 모두 0** 이었다 (14장 속성, 15장 리스너)</a:t>
+              <a:t>•  지연은 </a:t>
+            </a:r>
+            <a:r>
+              <a:rPr sz="1700" b="1">
+                <a:solidFill>
+                  <a:srgbClr val="222222"/>
+                </a:solidFill>
+                <a:latin typeface="맑은 고딕"/>
+              </a:rPr>
+              <a:t>두 번 모두 0</a:t>
+            </a:r>
+            <a:r>
+              <a:rPr sz="1700" b="0">
+                <a:solidFill>
+                  <a:srgbClr val="222222"/>
+                </a:solidFill>
+                <a:latin typeface="맑은 고딕"/>
+              </a:rPr>
+              <a:t> 이었다 (14장 속성, 15장 리스너)</a:t>
             </a:r>
           </a:p>
           <a:p>
@@ -14119,7 +17600,43 @@
                 </a:solidFill>
                 <a:latin typeface="맑은 고딕"/>
               </a:rPr>
-              <a:t>•  주 지표가 무너지면 **끊긴** 것, 보조만 나쁘면 **느린** 것</a:t>
+              <a:t>•  주 지표가 무너지면 </a:t>
+            </a:r>
+            <a:r>
+              <a:rPr sz="1700" b="1">
+                <a:solidFill>
+                  <a:srgbClr val="222222"/>
+                </a:solidFill>
+                <a:latin typeface="맑은 고딕"/>
+              </a:rPr>
+              <a:t>끊긴</a:t>
+            </a:r>
+            <a:r>
+              <a:rPr sz="1700" b="0">
+                <a:solidFill>
+                  <a:srgbClr val="222222"/>
+                </a:solidFill>
+                <a:latin typeface="맑은 고딕"/>
+              </a:rPr>
+              <a:t> 것, 보조만 나쁘면 </a:t>
+            </a:r>
+            <a:r>
+              <a:rPr sz="1700" b="1">
+                <a:solidFill>
+                  <a:srgbClr val="222222"/>
+                </a:solidFill>
+                <a:latin typeface="맑은 고딕"/>
+              </a:rPr>
+              <a:t>느린</a:t>
+            </a:r>
+            <a:r>
+              <a:rPr sz="1700" b="0">
+                <a:solidFill>
+                  <a:srgbClr val="222222"/>
+                </a:solidFill>
+                <a:latin typeface="맑은 고딕"/>
+              </a:rPr>
+              <a:t> 것</a:t>
             </a:r>
           </a:p>
         </p:txBody>
@@ -14298,7 +17815,25 @@
                 </a:solidFill>
                 <a:latin typeface="맑은 고딕"/>
               </a:rPr>
-              <a:t>•  **정상** — 모든 기댓값과 일치</a:t>
+              <a:t>•  </a:t>
+            </a:r>
+            <a:r>
+              <a:rPr sz="1700" b="1">
+                <a:solidFill>
+                  <a:srgbClr val="222222"/>
+                </a:solidFill>
+                <a:latin typeface="맑은 고딕"/>
+              </a:rPr>
+              <a:t>정상</a:t>
+            </a:r>
+            <a:r>
+              <a:rPr sz="1700" b="0">
+                <a:solidFill>
+                  <a:srgbClr val="222222"/>
+                </a:solidFill>
+                <a:latin typeface="맑은 고딕"/>
+              </a:rPr>
+              <a:t> — 모든 기댓값과 일치</a:t>
             </a:r>
           </a:p>
           <a:p>
@@ -14314,7 +17849,44 @@
                 </a:solidFill>
                 <a:latin typeface="맑은 고딕"/>
               </a:rPr>
-              <a:t>•  **주의** — 지연이 임계값 초과 (`SRL_ACTIVE=1` 인 상태)</a:t>
+              <a:t>•  </a:t>
+            </a:r>
+            <a:r>
+              <a:rPr sz="1700" b="1">
+                <a:solidFill>
+                  <a:srgbClr val="222222"/>
+                </a:solidFill>
+                <a:latin typeface="맑은 고딕"/>
+              </a:rPr>
+              <a:t>주의</a:t>
+            </a:r>
+            <a:r>
+              <a:rPr sz="1700" b="0">
+                <a:solidFill>
+                  <a:srgbClr val="222222"/>
+                </a:solidFill>
+                <a:latin typeface="맑은 고딕"/>
+              </a:rPr>
+              <a:t> — 지연이 임계값 초과 (</a:t>
+            </a:r>
+            <a:r>
+              <a:rPr sz="1700" b="0">
+                <a:solidFill>
+                  <a:srgbClr val="222222"/>
+                </a:solidFill>
+                <a:latin typeface="Consolas"/>
+                <a:cs typeface="Consolas"/>
+              </a:rPr>
+              <a:t>SRL_ACTIVE=1</a:t>
+            </a:r>
+            <a:r>
+              <a:rPr sz="1700" b="0">
+                <a:solidFill>
+                  <a:srgbClr val="222222"/>
+                </a:solidFill>
+                <a:latin typeface="맑은 고딕"/>
+              </a:rPr>
+              <a:t> 인 상태)</a:t>
             </a:r>
           </a:p>
           <a:p>
@@ -14330,7 +17902,63 @@
                 </a:solidFill>
                 <a:latin typeface="맑은 고딕"/>
               </a:rPr>
-              <a:t>•  **경고** — `DG_ERR&gt;0` 또는 `SEQUENCE#` 차이 2 이상</a:t>
+              <a:t>•  </a:t>
+            </a:r>
+            <a:r>
+              <a:rPr sz="1700" b="1">
+                <a:solidFill>
+                  <a:srgbClr val="222222"/>
+                </a:solidFill>
+                <a:latin typeface="맑은 고딕"/>
+              </a:rPr>
+              <a:t>경고</a:t>
+            </a:r>
+            <a:r>
+              <a:rPr sz="1700" b="0">
+                <a:solidFill>
+                  <a:srgbClr val="222222"/>
+                </a:solidFill>
+                <a:latin typeface="맑은 고딕"/>
+              </a:rPr>
+              <a:t> — </a:t>
+            </a:r>
+            <a:r>
+              <a:rPr sz="1700" b="0">
+                <a:solidFill>
+                  <a:srgbClr val="222222"/>
+                </a:solidFill>
+                <a:latin typeface="Consolas"/>
+                <a:cs typeface="Consolas"/>
+              </a:rPr>
+              <a:t>DG_ERR&gt;0</a:t>
+            </a:r>
+            <a:r>
+              <a:rPr sz="1700" b="0">
+                <a:solidFill>
+                  <a:srgbClr val="222222"/>
+                </a:solidFill>
+                <a:latin typeface="맑은 고딕"/>
+              </a:rPr>
+              <a:t> 또는 </a:t>
+            </a:r>
+            <a:r>
+              <a:rPr sz="1700" b="0">
+                <a:solidFill>
+                  <a:srgbClr val="222222"/>
+                </a:solidFill>
+                <a:latin typeface="Consolas"/>
+                <a:cs typeface="Consolas"/>
+              </a:rPr>
+              <a:t>SEQUENCE#</a:t>
+            </a:r>
+            <a:r>
+              <a:rPr sz="1700" b="0">
+                <a:solidFill>
+                  <a:srgbClr val="222222"/>
+                </a:solidFill>
+                <a:latin typeface="맑은 고딕"/>
+              </a:rPr>
+              <a:t> 차이 2 이상</a:t>
             </a:r>
           </a:p>
           <a:p>
@@ -14346,7 +17974,73 @@
                 </a:solidFill>
                 <a:latin typeface="맑은 고딕"/>
               </a:rPr>
-              <a:t>•  **심각** — `SRL_ACTIVE=0` / `MRP0` 없음 / `STATUS='ERROR'`</a:t>
+              <a:t>•  </a:t>
+            </a:r>
+            <a:r>
+              <a:rPr sz="1700" b="1">
+                <a:solidFill>
+                  <a:srgbClr val="222222"/>
+                </a:solidFill>
+                <a:latin typeface="맑은 고딕"/>
+              </a:rPr>
+              <a:t>심각</a:t>
+            </a:r>
+            <a:r>
+              <a:rPr sz="1700" b="0">
+                <a:solidFill>
+                  <a:srgbClr val="222222"/>
+                </a:solidFill>
+                <a:latin typeface="맑은 고딕"/>
+              </a:rPr>
+              <a:t> — </a:t>
+            </a:r>
+            <a:r>
+              <a:rPr sz="1700" b="0">
+                <a:solidFill>
+                  <a:srgbClr val="222222"/>
+                </a:solidFill>
+                <a:latin typeface="Consolas"/>
+                <a:cs typeface="Consolas"/>
+              </a:rPr>
+              <a:t>SRL_ACTIVE=0</a:t>
+            </a:r>
+            <a:r>
+              <a:rPr sz="1700" b="0">
+                <a:solidFill>
+                  <a:srgbClr val="222222"/>
+                </a:solidFill>
+                <a:latin typeface="맑은 고딕"/>
+              </a:rPr>
+              <a:t> / </a:t>
+            </a:r>
+            <a:r>
+              <a:rPr sz="1700" b="0">
+                <a:solidFill>
+                  <a:srgbClr val="222222"/>
+                </a:solidFill>
+                <a:latin typeface="Consolas"/>
+                <a:cs typeface="Consolas"/>
+              </a:rPr>
+              <a:t>MRP0</a:t>
+            </a:r>
+            <a:r>
+              <a:rPr sz="1700" b="0">
+                <a:solidFill>
+                  <a:srgbClr val="222222"/>
+                </a:solidFill>
+                <a:latin typeface="맑은 고딕"/>
+              </a:rPr>
+              <a:t> 없음 / </a:t>
+            </a:r>
+            <a:r>
+              <a:rPr sz="1700" b="0">
+                <a:solidFill>
+                  <a:srgbClr val="222222"/>
+                </a:solidFill>
+                <a:latin typeface="Consolas"/>
+                <a:cs typeface="Consolas"/>
+              </a:rPr>
+              <a:t>STATUS='ERROR'</a:t>
             </a:r>
           </a:p>
         </p:txBody>
@@ -14486,7 +18180,36 @@
                 </a:solidFill>
                 <a:latin typeface="맑은 고딕"/>
               </a:rPr>
-              <a:t>•  Standby 의 온라인 리두는 `SEQUENCE#`가 0, Primary 의 SRL 은 전부 `UNASSIGNED`</a:t>
+              <a:t>•  Standby 의 온라인 리두는 </a:t>
+            </a:r>
+            <a:r>
+              <a:rPr sz="1600" b="0">
+                <a:solidFill>
+                  <a:srgbClr val="222222"/>
+                </a:solidFill>
+                <a:latin typeface="Consolas"/>
+                <a:cs typeface="Consolas"/>
+              </a:rPr>
+              <a:t>SEQUENCE#</a:t>
+            </a:r>
+            <a:r>
+              <a:rPr sz="1600" b="0">
+                <a:solidFill>
+                  <a:srgbClr val="222222"/>
+                </a:solidFill>
+                <a:latin typeface="맑은 고딕"/>
+              </a:rPr>
+              <a:t>가 0, Primary 의 SRL 은 전부 </a:t>
+            </a:r>
+            <a:r>
+              <a:rPr sz="1600" b="0">
+                <a:solidFill>
+                  <a:srgbClr val="222222"/>
+                </a:solidFill>
+                <a:latin typeface="Consolas"/>
+                <a:cs typeface="Consolas"/>
+              </a:rPr>
+              <a:t>UNASSIGNED</a:t>
             </a:r>
           </a:p>
           <a:p>
@@ -14502,7 +18225,35 @@
                 </a:solidFill>
                 <a:latin typeface="맑은 고딕"/>
               </a:rPr>
-              <a:t>•  SRL 은 **`ACTIVE` 가 정확히 하나**이고 시퀀스가 Primary 와 같아야 한다</a:t>
+              <a:t>•  SRL 은 </a:t>
+            </a:r>
+            <a:r>
+              <a:rPr sz="1600" b="1">
+                <a:solidFill>
+                  <a:srgbClr val="222222"/>
+                </a:solidFill>
+                <a:latin typeface="Consolas"/>
+                <a:cs typeface="Consolas"/>
+              </a:rPr>
+              <a:t>ACTIVE</a:t>
+            </a:r>
+            <a:r>
+              <a:rPr sz="1600" b="1">
+                <a:solidFill>
+                  <a:srgbClr val="222222"/>
+                </a:solidFill>
+                <a:latin typeface="맑은 고딕"/>
+              </a:rPr>
+              <a:t> 가 정확히 하나</a:t>
+            </a:r>
+            <a:r>
+              <a:rPr sz="1600" b="0">
+                <a:solidFill>
+                  <a:srgbClr val="222222"/>
+                </a:solidFill>
+                <a:latin typeface="맑은 고딕"/>
+              </a:rPr>
+              <a:t>이고 시퀀스가 Primary 와 같아야 한다</a:t>
             </a:r>
           </a:p>
           <a:p>
@@ -14518,7 +18269,45 @@
                 </a:solidFill>
                 <a:latin typeface="맑은 고딕"/>
               </a:rPr>
-              <a:t>•  `V$ARCHIVE_DEST` 는 설정, `_STATUS` 는 지금 상태</a:t>
+              <a:t>•  </a:t>
+            </a:r>
+            <a:r>
+              <a:rPr sz="1600" b="0">
+                <a:solidFill>
+                  <a:srgbClr val="222222"/>
+                </a:solidFill>
+                <a:latin typeface="Consolas"/>
+                <a:cs typeface="Consolas"/>
+              </a:rPr>
+              <a:t>V$ARCHIVE_DEST</a:t>
+            </a:r>
+            <a:r>
+              <a:rPr sz="1600" b="0">
+                <a:solidFill>
+                  <a:srgbClr val="222222"/>
+                </a:solidFill>
+                <a:latin typeface="맑은 고딕"/>
+              </a:rPr>
+              <a:t> 는 설정, </a:t>
+            </a:r>
+            <a:r>
+              <a:rPr sz="1600" b="0">
+                <a:solidFill>
+                  <a:srgbClr val="222222"/>
+                </a:solidFill>
+                <a:latin typeface="Consolas"/>
+                <a:cs typeface="Consolas"/>
+              </a:rPr>
+              <a:t>_STATUS</a:t>
+            </a:r>
+            <a:r>
+              <a:rPr sz="1600" b="0">
+                <a:solidFill>
+                  <a:srgbClr val="222222"/>
+                </a:solidFill>
+                <a:latin typeface="맑은 고딕"/>
+              </a:rPr>
+              <a:t> 는 지금 상태</a:t>
             </a:r>
           </a:p>
           <a:p>
@@ -14534,7 +18323,73 @@
                 </a:solidFill>
                 <a:latin typeface="맑은 고딕"/>
               </a:rPr>
-              <a:t>•  `V$ARCHIVED_LOG` 의 `APPLIED` 는 **`dest_id=2`만** 의미가 있다</a:t>
+              <a:t>•  </a:t>
+            </a:r>
+            <a:r>
+              <a:rPr sz="1600" b="0">
+                <a:solidFill>
+                  <a:srgbClr val="222222"/>
+                </a:solidFill>
+                <a:latin typeface="Consolas"/>
+                <a:cs typeface="Consolas"/>
+              </a:rPr>
+              <a:t>V$ARCHIVED_LOG</a:t>
+            </a:r>
+            <a:r>
+              <a:rPr sz="1600" b="0">
+                <a:solidFill>
+                  <a:srgbClr val="222222"/>
+                </a:solidFill>
+                <a:latin typeface="맑은 고딕"/>
+              </a:rPr>
+              <a:t> 의 </a:t>
+            </a:r>
+            <a:r>
+              <a:rPr sz="1600" b="0">
+                <a:solidFill>
+                  <a:srgbClr val="222222"/>
+                </a:solidFill>
+                <a:latin typeface="Consolas"/>
+                <a:cs typeface="Consolas"/>
+              </a:rPr>
+              <a:t>APPLIED</a:t>
+            </a:r>
+            <a:r>
+              <a:rPr sz="1600" b="0">
+                <a:solidFill>
+                  <a:srgbClr val="222222"/>
+                </a:solidFill>
+                <a:latin typeface="맑은 고딕"/>
+              </a:rPr>
+              <a:t> 는 </a:t>
+            </a:r>
+            <a:r>
+              <a:rPr sz="1600" b="1">
+                <a:solidFill>
+                  <a:srgbClr val="222222"/>
+                </a:solidFill>
+                <a:latin typeface="Consolas"/>
+                <a:cs typeface="Consolas"/>
+              </a:rPr>
+              <a:t>dest_id=2</a:t>
+            </a:r>
+            <a:r>
+              <a:rPr sz="1600" b="1">
+                <a:solidFill>
+                  <a:srgbClr val="222222"/>
+                </a:solidFill>
+                <a:latin typeface="맑은 고딕"/>
+              </a:rPr>
+              <a:t>만</a:t>
+            </a:r>
+            <a:r>
+              <a:rPr sz="1600" b="0">
+                <a:solidFill>
+                  <a:srgbClr val="222222"/>
+                </a:solidFill>
+                <a:latin typeface="맑은 고딕"/>
+              </a:rPr>
+              <a:t> 의미가 있다</a:t>
             </a:r>
           </a:p>
           <a:p>
@@ -14550,7 +18405,26 @@
                 </a:solidFill>
                 <a:latin typeface="맑은 고딕"/>
               </a:rPr>
-              <a:t>•  `APPLIED_SEQ#`=0 은 정상 — 실시간 적용은 SRL 에서 읽는다</a:t>
+              <a:t>•  </a:t>
+            </a:r>
+            <a:r>
+              <a:rPr sz="1600" b="0">
+                <a:solidFill>
+                  <a:srgbClr val="222222"/>
+                </a:solidFill>
+                <a:latin typeface="Consolas"/>
+                <a:cs typeface="Consolas"/>
+              </a:rPr>
+              <a:t>APPLIED_SEQ#</a:t>
+            </a:r>
+            <a:r>
+              <a:rPr sz="1600" b="0">
+                <a:solidFill>
+                  <a:srgbClr val="222222"/>
+                </a:solidFill>
+                <a:latin typeface="맑은 고딕"/>
+              </a:rPr>
+              <a:t>=0 은 정상 — 실시간 적용은 SRL 에서 읽는다</a:t>
             </a:r>
           </a:p>
           <a:p>
@@ -14566,7 +18440,55 @@
                 </a:solidFill>
                 <a:latin typeface="맑은 고딕"/>
               </a:rPr>
-              <a:t>•  리스너를 내리면 `ERROR` / `INACTIVE` / **`ORA-12541`**</a:t>
+              <a:t>•  리스너를 내리면 </a:t>
+            </a:r>
+            <a:r>
+              <a:rPr sz="1600" b="0">
+                <a:solidFill>
+                  <a:srgbClr val="222222"/>
+                </a:solidFill>
+                <a:latin typeface="Consolas"/>
+                <a:cs typeface="Consolas"/>
+              </a:rPr>
+              <a:t>ERROR</a:t>
+            </a:r>
+            <a:r>
+              <a:rPr sz="1600" b="0">
+                <a:solidFill>
+                  <a:srgbClr val="222222"/>
+                </a:solidFill>
+                <a:latin typeface="맑은 고딕"/>
+              </a:rPr>
+              <a:t> / </a:t>
+            </a:r>
+            <a:r>
+              <a:rPr sz="1600" b="0">
+                <a:solidFill>
+                  <a:srgbClr val="222222"/>
+                </a:solidFill>
+                <a:latin typeface="Consolas"/>
+                <a:cs typeface="Consolas"/>
+              </a:rPr>
+              <a:t>INACTIVE</a:t>
+            </a:r>
+            <a:r>
+              <a:rPr sz="1600" b="0">
+                <a:solidFill>
+                  <a:srgbClr val="222222"/>
+                </a:solidFill>
+                <a:latin typeface="맑은 고딕"/>
+              </a:rPr>
+              <a:t> / </a:t>
+            </a:r>
+            <a:r>
+              <a:rPr sz="1600" b="1">
+                <a:solidFill>
+                  <a:srgbClr val="222222"/>
+                </a:solidFill>
+                <a:latin typeface="Consolas"/>
+                <a:cs typeface="Consolas"/>
+              </a:rPr>
+              <a:t>ORA-12541</a:t>
             </a:r>
           </a:p>
           <a:p>
@@ -14582,7 +18504,25 @@
                 </a:solidFill>
                 <a:latin typeface="맑은 고딕"/>
               </a:rPr>
-              <a:t>•  그때도 **두 지연은 0** — 세 번째로 확인</a:t>
+              <a:t>•  그때도 </a:t>
+            </a:r>
+            <a:r>
+              <a:rPr sz="1600" b="1">
+                <a:solidFill>
+                  <a:srgbClr val="222222"/>
+                </a:solidFill>
+                <a:latin typeface="맑은 고딕"/>
+              </a:rPr>
+              <a:t>두 지연은 0</a:t>
+            </a:r>
+            <a:r>
+              <a:rPr sz="1600" b="0">
+                <a:solidFill>
+                  <a:srgbClr val="222222"/>
+                </a:solidFill>
+                <a:latin typeface="맑은 고딕"/>
+              </a:rPr>
+              <a:t> — 세 번째로 확인</a:t>
             </a:r>
           </a:p>
           <a:p>
@@ -14598,7 +18538,83 @@
                 </a:solidFill>
                 <a:latin typeface="맑은 고딕"/>
               </a:rPr>
-              <a:t>•  `ENABLE`+`ERROR`=장애, `RESET`=Broker, `DEFER`=사람</a:t>
+              <a:t>•  </a:t>
+            </a:r>
+            <a:r>
+              <a:rPr sz="1600" b="0">
+                <a:solidFill>
+                  <a:srgbClr val="222222"/>
+                </a:solidFill>
+                <a:latin typeface="Consolas"/>
+                <a:cs typeface="Consolas"/>
+              </a:rPr>
+              <a:t>ENABLE</a:t>
+            </a:r>
+            <a:r>
+              <a:rPr sz="1600" b="0">
+                <a:solidFill>
+                  <a:srgbClr val="222222"/>
+                </a:solidFill>
+                <a:latin typeface="맑은 고딕"/>
+              </a:rPr>
+              <a:t>+</a:t>
+            </a:r>
+            <a:r>
+              <a:rPr sz="1600" b="0">
+                <a:solidFill>
+                  <a:srgbClr val="222222"/>
+                </a:solidFill>
+                <a:latin typeface="Consolas"/>
+                <a:cs typeface="Consolas"/>
+              </a:rPr>
+              <a:t>ERROR</a:t>
+            </a:r>
+            <a:r>
+              <a:rPr sz="1600" b="0">
+                <a:solidFill>
+                  <a:srgbClr val="222222"/>
+                </a:solidFill>
+                <a:latin typeface="맑은 고딕"/>
+              </a:rPr>
+              <a:t>=장애, </a:t>
+            </a:r>
+            <a:r>
+              <a:rPr sz="1600" b="0">
+                <a:solidFill>
+                  <a:srgbClr val="222222"/>
+                </a:solidFill>
+                <a:latin typeface="Consolas"/>
+                <a:cs typeface="Consolas"/>
+              </a:rPr>
+              <a:t>RESET</a:t>
+            </a:r>
+            <a:r>
+              <a:rPr sz="1600" b="0">
+                <a:solidFill>
+                  <a:srgbClr val="222222"/>
+                </a:solidFill>
+                <a:latin typeface="맑은 고딕"/>
+              </a:rPr>
+              <a:t>=Broker, </a:t>
+            </a:r>
+            <a:r>
+              <a:rPr sz="1600" b="0">
+                <a:solidFill>
+                  <a:srgbClr val="222222"/>
+                </a:solidFill>
+                <a:latin typeface="Consolas"/>
+                <a:cs typeface="Consolas"/>
+              </a:rPr>
+              <a:t>DEFER</a:t>
+            </a:r>
+            <a:r>
+              <a:rPr sz="1600" b="0">
+                <a:solidFill>
+                  <a:srgbClr val="222222"/>
+                </a:solidFill>
+                <a:latin typeface="맑은 고딕"/>
+              </a:rPr>
+              <a:t>=사람</a:t>
             </a:r>
           </a:p>
           <a:p>
@@ -14614,7 +18630,36 @@
                 </a:solidFill>
                 <a:latin typeface="맑은 고딕"/>
               </a:rPr>
-              <a:t>•  판정 기준은 `SEVERITY` 가 아니라 **`ERROR_CODE`**</a:t>
+              <a:t>•  판정 기준은 </a:t>
+            </a:r>
+            <a:r>
+              <a:rPr sz="1600" b="0">
+                <a:solidFill>
+                  <a:srgbClr val="222222"/>
+                </a:solidFill>
+                <a:latin typeface="Consolas"/>
+                <a:cs typeface="Consolas"/>
+              </a:rPr>
+              <a:t>SEVERITY</a:t>
+            </a:r>
+            <a:r>
+              <a:rPr sz="1600" b="0">
+                <a:solidFill>
+                  <a:srgbClr val="222222"/>
+                </a:solidFill>
+                <a:latin typeface="맑은 고딕"/>
+              </a:rPr>
+              <a:t> 가 아니라 </a:t>
+            </a:r>
+            <a:r>
+              <a:rPr sz="1600" b="1">
+                <a:solidFill>
+                  <a:srgbClr val="222222"/>
+                </a:solidFill>
+                <a:latin typeface="Consolas"/>
+                <a:cs typeface="Consolas"/>
+              </a:rPr>
+              <a:t>ERROR_CODE</a:t>
             </a:r>
           </a:p>
           <a:p>
@@ -14630,7 +18675,44 @@
                 </a:solidFill>
                 <a:latin typeface="맑은 고딕"/>
               </a:rPr>
-              <a:t>•  복구까지 **약 4~5분** (`ReopenSecs` 300)</a:t>
+              <a:t>•  복구까지 </a:t>
+            </a:r>
+            <a:r>
+              <a:rPr sz="1600" b="1">
+                <a:solidFill>
+                  <a:srgbClr val="222222"/>
+                </a:solidFill>
+                <a:latin typeface="맑은 고딕"/>
+              </a:rPr>
+              <a:t>약 4~5분</a:t>
+            </a:r>
+            <a:r>
+              <a:rPr sz="1600" b="0">
+                <a:solidFill>
+                  <a:srgbClr val="222222"/>
+                </a:solidFill>
+                <a:latin typeface="맑은 고딕"/>
+              </a:rPr>
+              <a:t> (</a:t>
+            </a:r>
+            <a:r>
+              <a:rPr sz="1600" b="0">
+                <a:solidFill>
+                  <a:srgbClr val="222222"/>
+                </a:solidFill>
+                <a:latin typeface="Consolas"/>
+                <a:cs typeface="Consolas"/>
+              </a:rPr>
+              <a:t>ReopenSecs</a:t>
+            </a:r>
+            <a:r>
+              <a:rPr sz="1600" b="0">
+                <a:solidFill>
+                  <a:srgbClr val="222222"/>
+                </a:solidFill>
+                <a:latin typeface="맑은 고딕"/>
+              </a:rPr>
+              <a:t> 300)</a:t>
             </a:r>
           </a:p>
           <a:p>
@@ -14646,7 +18728,35 @@
                 </a:solidFill>
                 <a:latin typeface="맑은 고딕"/>
               </a:rPr>
-              <a:t>•  조치 직후 Broker 가 `ERROR` 인 것은 **판정 시차**</a:t>
+              <a:t>•  조치 직후 Broker 가 </a:t>
+            </a:r>
+            <a:r>
+              <a:rPr sz="1600" b="0">
+                <a:solidFill>
+                  <a:srgbClr val="222222"/>
+                </a:solidFill>
+                <a:latin typeface="Consolas"/>
+                <a:cs typeface="Consolas"/>
+              </a:rPr>
+              <a:t>ERROR</a:t>
+            </a:r>
+            <a:r>
+              <a:rPr sz="1600" b="0">
+                <a:solidFill>
+                  <a:srgbClr val="222222"/>
+                </a:solidFill>
+                <a:latin typeface="맑은 고딕"/>
+              </a:rPr>
+              <a:t> 인 것은 </a:t>
+            </a:r>
+            <a:r>
+              <a:rPr sz="1600" b="1">
+                <a:solidFill>
+                  <a:srgbClr val="222222"/>
+                </a:solidFill>
+                <a:latin typeface="맑은 고딕"/>
+              </a:rPr>
+              <a:t>판정 시차</a:t>
             </a:r>
           </a:p>
           <a:p>
@@ -14662,7 +18772,35 @@
                 </a:solidFill>
                 <a:latin typeface="맑은 고딕"/>
               </a:rPr>
-              <a:t>•  `LOG_ARCHIVE_TRACE` 는 비트마스크, 잘못된 값은 **ORA-02017**</a:t>
+              <a:t>•  </a:t>
+            </a:r>
+            <a:r>
+              <a:rPr sz="1600" b="0">
+                <a:solidFill>
+                  <a:srgbClr val="222222"/>
+                </a:solidFill>
+                <a:latin typeface="Consolas"/>
+                <a:cs typeface="Consolas"/>
+              </a:rPr>
+              <a:t>LOG_ARCHIVE_TRACE</a:t>
+            </a:r>
+            <a:r>
+              <a:rPr sz="1600" b="0">
+                <a:solidFill>
+                  <a:srgbClr val="222222"/>
+                </a:solidFill>
+                <a:latin typeface="맑은 고딕"/>
+              </a:rPr>
+              <a:t> 는 비트마스크, 잘못된 값은 </a:t>
+            </a:r>
+            <a:r>
+              <a:rPr sz="1600" b="1">
+                <a:solidFill>
+                  <a:srgbClr val="222222"/>
+                </a:solidFill>
+                <a:latin typeface="맑은 고딕"/>
+              </a:rPr>
+              <a:t>ORA-02017</a:t>
             </a:r>
           </a:p>
           <a:p>
@@ -14678,7 +18816,26 @@
                 </a:solidFill>
                 <a:latin typeface="맑은 고딕"/>
               </a:rPr>
-              <a:t>•  점검표의 핵심은 **`SRL_ACTIVE`**, 지연은 보조 지표</a:t>
+              <a:t>•  점검표의 핵심은 </a:t>
+            </a:r>
+            <a:r>
+              <a:rPr sz="1600" b="1">
+                <a:solidFill>
+                  <a:srgbClr val="222222"/>
+                </a:solidFill>
+                <a:latin typeface="Consolas"/>
+                <a:cs typeface="Consolas"/>
+              </a:rPr>
+              <a:t>SRL_ACTIVE</a:t>
+            </a:r>
+            <a:r>
+              <a:rPr sz="1600" b="0">
+                <a:solidFill>
+                  <a:srgbClr val="222222"/>
+                </a:solidFill>
+                <a:latin typeface="맑은 고딕"/>
+              </a:rPr>
+              <a:t>, 지연은 보조 지표</a:t>
             </a:r>
           </a:p>
           <a:p>
@@ -14694,7 +18851,45 @@
                 </a:solidFill>
                 <a:latin typeface="맑은 고딕"/>
               </a:rPr>
-              <a:t>•  Logical 이면 `MRP0` 도 `V$DATAGUARD_STATS` 도 없다</a:t>
+              <a:t>•  Logical 이면 </a:t>
+            </a:r>
+            <a:r>
+              <a:rPr sz="1600" b="0">
+                <a:solidFill>
+                  <a:srgbClr val="222222"/>
+                </a:solidFill>
+                <a:latin typeface="Consolas"/>
+                <a:cs typeface="Consolas"/>
+              </a:rPr>
+              <a:t>MRP0</a:t>
+            </a:r>
+            <a:r>
+              <a:rPr sz="1600" b="0">
+                <a:solidFill>
+                  <a:srgbClr val="222222"/>
+                </a:solidFill>
+                <a:latin typeface="맑은 고딕"/>
+              </a:rPr>
+              <a:t> 도 </a:t>
+            </a:r>
+            <a:r>
+              <a:rPr sz="1600" b="0">
+                <a:solidFill>
+                  <a:srgbClr val="222222"/>
+                </a:solidFill>
+                <a:latin typeface="Consolas"/>
+                <a:cs typeface="Consolas"/>
+              </a:rPr>
+              <a:t>V$DATAGUARD_STATS</a:t>
+            </a:r>
+            <a:r>
+              <a:rPr sz="1600" b="0">
+                <a:solidFill>
+                  <a:srgbClr val="222222"/>
+                </a:solidFill>
+                <a:latin typeface="맑은 고딕"/>
+              </a:rPr>
+              <a:t> 도 없다</a:t>
             </a:r>
           </a:p>
           <a:p>
@@ -14710,7 +18905,45 @@
                 </a:solidFill>
                 <a:latin typeface="맑은 고딕"/>
               </a:rPr>
-              <a:t>•  `V$LOGSTDBY_TRANSACTION` 은 전부 **`PRIMARY_`** 접두어</a:t>
+              <a:t>•  </a:t>
+            </a:r>
+            <a:r>
+              <a:rPr sz="1600" b="0">
+                <a:solidFill>
+                  <a:srgbClr val="222222"/>
+                </a:solidFill>
+                <a:latin typeface="Consolas"/>
+                <a:cs typeface="Consolas"/>
+              </a:rPr>
+              <a:t>V$LOGSTDBY_TRANSACTION</a:t>
+            </a:r>
+            <a:r>
+              <a:rPr sz="1600" b="0">
+                <a:solidFill>
+                  <a:srgbClr val="222222"/>
+                </a:solidFill>
+                <a:latin typeface="맑은 고딕"/>
+              </a:rPr>
+              <a:t> 은 전부 </a:t>
+            </a:r>
+            <a:r>
+              <a:rPr sz="1600" b="1">
+                <a:solidFill>
+                  <a:srgbClr val="222222"/>
+                </a:solidFill>
+                <a:latin typeface="Consolas"/>
+                <a:cs typeface="Consolas"/>
+              </a:rPr>
+              <a:t>PRIMARY_</a:t>
+            </a:r>
+            <a:r>
+              <a:rPr sz="1600" b="0">
+                <a:solidFill>
+                  <a:srgbClr val="222222"/>
+                </a:solidFill>
+                <a:latin typeface="맑은 고딕"/>
+              </a:rPr>
+              <a:t> 접두어</a:t>
             </a:r>
           </a:p>
         </p:txBody>
@@ -15077,7 +19310,54 @@
                 </a:solidFill>
                 <a:latin typeface="맑은 고딕"/>
               </a:rPr>
-              <a:t>•  `LogShipping=OFF` 인데 `SHOW CONFIGURATION` 은 **SUCCESS**</a:t>
+              <a:t>•  </a:t>
+            </a:r>
+            <a:r>
+              <a:rPr sz="1700" b="0">
+                <a:solidFill>
+                  <a:srgbClr val="222222"/>
+                </a:solidFill>
+                <a:latin typeface="Consolas"/>
+                <a:cs typeface="Consolas"/>
+              </a:rPr>
+              <a:t>LogShipping=OFF</a:t>
+            </a:r>
+            <a:r>
+              <a:rPr sz="1700" b="0">
+                <a:solidFill>
+                  <a:srgbClr val="222222"/>
+                </a:solidFill>
+                <a:latin typeface="맑은 고딕"/>
+              </a:rPr>
+              <a:t> 인데 </a:t>
+            </a:r>
+            <a:r>
+              <a:rPr sz="1700" b="0">
+                <a:solidFill>
+                  <a:srgbClr val="222222"/>
+                </a:solidFill>
+                <a:latin typeface="Consolas"/>
+                <a:cs typeface="Consolas"/>
+              </a:rPr>
+              <a:t>SHOW CONFIGURATION</a:t>
+            </a:r>
+            <a:r>
+              <a:rPr sz="1700" b="0">
+                <a:solidFill>
+                  <a:srgbClr val="222222"/>
+                </a:solidFill>
+                <a:latin typeface="맑은 고딕"/>
+              </a:rPr>
+              <a:t> 은 </a:t>
+            </a:r>
+            <a:r>
+              <a:rPr sz="1700" b="1">
+                <a:solidFill>
+                  <a:srgbClr val="222222"/>
+                </a:solidFill>
+                <a:latin typeface="맑은 고딕"/>
+              </a:rPr>
+              <a:t>SUCCESS</a:t>
             </a:r>
           </a:p>
           <a:p>
@@ -15093,7 +19373,16 @@
                 </a:solidFill>
                 <a:latin typeface="맑은 고딕"/>
               </a:rPr>
-              <a:t>•  두 지연도 **0**</a:t>
+              <a:t>•  두 지연도 </a:t>
+            </a:r>
+            <a:r>
+              <a:rPr sz="1700" b="1">
+                <a:solidFill>
+                  <a:srgbClr val="222222"/>
+                </a:solidFill>
+                <a:latin typeface="맑은 고딕"/>
+              </a:rPr>
+              <a:t>0</a:t>
             </a:r>
           </a:p>
           <a:p>
@@ -15109,7 +19398,36 @@
                 </a:solidFill>
                 <a:latin typeface="맑은 고딕"/>
               </a:rPr>
-              <a:t>•  `VALIDATE` 만 `Ready for Switchover: No`</a:t>
+              <a:t>•  </a:t>
+            </a:r>
+            <a:r>
+              <a:rPr sz="1700" b="0">
+                <a:solidFill>
+                  <a:srgbClr val="222222"/>
+                </a:solidFill>
+                <a:latin typeface="Consolas"/>
+                <a:cs typeface="Consolas"/>
+              </a:rPr>
+              <a:t>VALIDATE</a:t>
+            </a:r>
+            <a:r>
+              <a:rPr sz="1700" b="0">
+                <a:solidFill>
+                  <a:srgbClr val="222222"/>
+                </a:solidFill>
+                <a:latin typeface="맑은 고딕"/>
+              </a:rPr>
+              <a:t> 만 </a:t>
+            </a:r>
+            <a:r>
+              <a:rPr sz="1700" b="0">
+                <a:solidFill>
+                  <a:srgbClr val="222222"/>
+                </a:solidFill>
+                <a:latin typeface="Consolas"/>
+                <a:cs typeface="Consolas"/>
+              </a:rPr>
+              <a:t>Ready for Switchover: No</a:t>
             </a:r>
           </a:p>
           <a:p>
@@ -15125,7 +19443,16 @@
                 </a:solidFill>
                 <a:latin typeface="맑은 고딕"/>
               </a:rPr>
-              <a:t>•  **어떤 위험은 요약에 나타나지 않는다**</a:t>
+              <a:t>•  </a:t>
+            </a:r>
+            <a:r>
+              <a:rPr sz="1700" b="1">
+                <a:solidFill>
+                  <a:srgbClr val="222222"/>
+                </a:solidFill>
+                <a:latin typeface="맑은 고딕"/>
+              </a:rPr>
+              <a:t>어떤 위험은 요약에 나타나지 않는다</a:t>
             </a:r>
           </a:p>
         </p:txBody>
@@ -15304,7 +19631,25 @@
                 </a:solidFill>
                 <a:latin typeface="맑은 고딕"/>
               </a:rPr>
-              <a:t>•  **① Broker 를 쓸 수 없는 환경** — JDBC 전용 감시, 운영 정책</a:t>
+              <a:t>•  </a:t>
+            </a:r>
+            <a:r>
+              <a:rPr sz="1700" b="1">
+                <a:solidFill>
+                  <a:srgbClr val="222222"/>
+                </a:solidFill>
+                <a:latin typeface="맑은 고딕"/>
+              </a:rPr>
+              <a:t>① Broker 를 쓸 수 없는 환경</a:t>
+            </a:r>
+            <a:r>
+              <a:rPr sz="1700" b="0">
+                <a:solidFill>
+                  <a:srgbClr val="222222"/>
+                </a:solidFill>
+                <a:latin typeface="맑은 고딕"/>
+              </a:rPr>
+              <a:t> — JDBC 전용 감시, 운영 정책</a:t>
             </a:r>
           </a:p>
           <a:p>
@@ -15320,7 +19665,25 @@
                 </a:solidFill>
                 <a:latin typeface="맑은 고딕"/>
               </a:rPr>
-              <a:t>•  **② 왜 그 값이 나왔는지** 요약은 말해 주지 않는다</a:t>
+              <a:t>•  </a:t>
+            </a:r>
+            <a:r>
+              <a:rPr sz="1700" b="1">
+                <a:solidFill>
+                  <a:srgbClr val="222222"/>
+                </a:solidFill>
+                <a:latin typeface="맑은 고딕"/>
+              </a:rPr>
+              <a:t>② 왜 그 값이 나왔는지</a:t>
+            </a:r>
+            <a:r>
+              <a:rPr sz="1700" b="0">
+                <a:solidFill>
+                  <a:srgbClr val="222222"/>
+                </a:solidFill>
+                <a:latin typeface="맑은 고딕"/>
+              </a:rPr>
+              <a:t> 요약은 말해 주지 않는다</a:t>
             </a:r>
           </a:p>
           <a:p>
@@ -15336,7 +19699,16 @@
                 </a:solidFill>
                 <a:latin typeface="맑은 고딕"/>
               </a:rPr>
-              <a:t>•  **③ 장애의 상세는 아래층에 있다**</a:t>
+              <a:t>•  </a:t>
+            </a:r>
+            <a:r>
+              <a:rPr sz="1700" b="1">
+                <a:solidFill>
+                  <a:srgbClr val="222222"/>
+                </a:solidFill>
+                <a:latin typeface="맑은 고딕"/>
+              </a:rPr>
+              <a:t>③ 장애의 상세는 아래층에 있다</a:t>
             </a:r>
           </a:p>
           <a:p>
@@ -15352,7 +19724,36 @@
                 </a:solidFill>
                 <a:latin typeface="맑은 고딕"/>
               </a:rPr>
-              <a:t>•  Broker 는 `ORA-16857`, V$ 뷰는 **`ORA-12541`**</a:t>
+              <a:t>•  Broker 는 </a:t>
+            </a:r>
+            <a:r>
+              <a:rPr sz="1700" b="0">
+                <a:solidFill>
+                  <a:srgbClr val="222222"/>
+                </a:solidFill>
+                <a:latin typeface="Consolas"/>
+                <a:cs typeface="Consolas"/>
+              </a:rPr>
+              <a:t>ORA-16857</a:t>
+            </a:r>
+            <a:r>
+              <a:rPr sz="1700" b="0">
+                <a:solidFill>
+                  <a:srgbClr val="222222"/>
+                </a:solidFill>
+                <a:latin typeface="맑은 고딕"/>
+              </a:rPr>
+              <a:t>, V$ 뷰는 </a:t>
+            </a:r>
+            <a:r>
+              <a:rPr sz="1700" b="1">
+                <a:solidFill>
+                  <a:srgbClr val="222222"/>
+                </a:solidFill>
+                <a:latin typeface="Consolas"/>
+                <a:cs typeface="Consolas"/>
+              </a:rPr>
+              <a:t>ORA-12541</a:t>
             </a:r>
           </a:p>
         </p:txBody>
@@ -15770,7 +20171,44 @@
                 </a:solidFill>
                 <a:latin typeface="맑은 고딕"/>
               </a:rPr>
-              <a:t>•  `CURRENT` 는 **정확히 하나** (실측 그룹 2, 시퀀스 74)</a:t>
+              <a:t>•  </a:t>
+            </a:r>
+            <a:r>
+              <a:rPr sz="1700" b="0">
+                <a:solidFill>
+                  <a:srgbClr val="222222"/>
+                </a:solidFill>
+                <a:latin typeface="Consolas"/>
+                <a:cs typeface="Consolas"/>
+              </a:rPr>
+              <a:t>CURRENT</a:t>
+            </a:r>
+            <a:r>
+              <a:rPr sz="1700" b="0">
+                <a:solidFill>
+                  <a:srgbClr val="222222"/>
+                </a:solidFill>
+                <a:latin typeface="맑은 고딕"/>
+              </a:rPr>
+              <a:t> 는 </a:t>
+            </a:r>
+            <a:r>
+              <a:rPr sz="1700" b="1">
+                <a:solidFill>
+                  <a:srgbClr val="222222"/>
+                </a:solidFill>
+                <a:latin typeface="맑은 고딕"/>
+              </a:rPr>
+              <a:t>정확히 하나</a:t>
+            </a:r>
+            <a:r>
+              <a:rPr sz="1700" b="0">
+                <a:solidFill>
+                  <a:srgbClr val="222222"/>
+                </a:solidFill>
+                <a:latin typeface="맑은 고딕"/>
+              </a:rPr>
+              <a:t> (실측 그룹 2, 시퀀스 74)</a:t>
             </a:r>
           </a:p>
           <a:p>
@@ -15786,7 +20224,35 @@
                 </a:solidFill>
                 <a:latin typeface="맑은 고딕"/>
               </a:rPr>
-              <a:t>•  그 그룹만 `ARCHIVED=NO` — **정상이다**</a:t>
+              <a:t>•  그 그룹만 </a:t>
+            </a:r>
+            <a:r>
+              <a:rPr sz="1700" b="0">
+                <a:solidFill>
+                  <a:srgbClr val="222222"/>
+                </a:solidFill>
+                <a:latin typeface="Consolas"/>
+                <a:cs typeface="Consolas"/>
+              </a:rPr>
+              <a:t>ARCHIVED=NO</a:t>
+            </a:r>
+            <a:r>
+              <a:rPr sz="1700" b="0">
+                <a:solidFill>
+                  <a:srgbClr val="222222"/>
+                </a:solidFill>
+                <a:latin typeface="맑은 고딕"/>
+              </a:rPr>
+              <a:t> — </a:t>
+            </a:r>
+            <a:r>
+              <a:rPr sz="1700" b="1">
+                <a:solidFill>
+                  <a:srgbClr val="222222"/>
+                </a:solidFill>
+                <a:latin typeface="맑은 고딕"/>
+              </a:rPr>
+              <a:t>정상이다</a:t>
             </a:r>
           </a:p>
           <a:p>
@@ -15802,7 +20268,45 @@
                 </a:solidFill>
                 <a:latin typeface="맑은 고딕"/>
               </a:rPr>
-              <a:t>•  `ACTIVE` + `ARCHIVED=NO` 가 쌓이면 아카이버가 밀린다</a:t>
+              <a:t>•  </a:t>
+            </a:r>
+            <a:r>
+              <a:rPr sz="1700" b="0">
+                <a:solidFill>
+                  <a:srgbClr val="222222"/>
+                </a:solidFill>
+                <a:latin typeface="Consolas"/>
+                <a:cs typeface="Consolas"/>
+              </a:rPr>
+              <a:t>ACTIVE</a:t>
+            </a:r>
+            <a:r>
+              <a:rPr sz="1700" b="0">
+                <a:solidFill>
+                  <a:srgbClr val="222222"/>
+                </a:solidFill>
+                <a:latin typeface="맑은 고딕"/>
+              </a:rPr>
+              <a:t> + </a:t>
+            </a:r>
+            <a:r>
+              <a:rPr sz="1700" b="0">
+                <a:solidFill>
+                  <a:srgbClr val="222222"/>
+                </a:solidFill>
+                <a:latin typeface="Consolas"/>
+                <a:cs typeface="Consolas"/>
+              </a:rPr>
+              <a:t>ARCHIVED=NO</a:t>
+            </a:r>
+            <a:r>
+              <a:rPr sz="1700" b="0">
+                <a:solidFill>
+                  <a:srgbClr val="222222"/>
+                </a:solidFill>
+                <a:latin typeface="맑은 고딕"/>
+              </a:rPr>
+              <a:t> 가 쌓이면 아카이버가 밀린다</a:t>
             </a:r>
           </a:p>
           <a:p>
@@ -15818,7 +20322,54 @@
                 </a:solidFill>
                 <a:latin typeface="맑은 고딕"/>
               </a:rPr>
-              <a:t>•  `V$LOGFILE` 의 `STATUS` 는 **비어 있는 것이 정상**</a:t>
+              <a:t>•  </a:t>
+            </a:r>
+            <a:r>
+              <a:rPr sz="1700" b="0">
+                <a:solidFill>
+                  <a:srgbClr val="222222"/>
+                </a:solidFill>
+                <a:latin typeface="Consolas"/>
+                <a:cs typeface="Consolas"/>
+              </a:rPr>
+              <a:t>V$LOGFILE</a:t>
+            </a:r>
+            <a:r>
+              <a:rPr sz="1700" b="0">
+                <a:solidFill>
+                  <a:srgbClr val="222222"/>
+                </a:solidFill>
+                <a:latin typeface="맑은 고딕"/>
+              </a:rPr>
+              <a:t> 의 </a:t>
+            </a:r>
+            <a:r>
+              <a:rPr sz="1700" b="0">
+                <a:solidFill>
+                  <a:srgbClr val="222222"/>
+                </a:solidFill>
+                <a:latin typeface="Consolas"/>
+                <a:cs typeface="Consolas"/>
+              </a:rPr>
+              <a:t>STATUS</a:t>
+            </a:r>
+            <a:r>
+              <a:rPr sz="1700" b="0">
+                <a:solidFill>
+                  <a:srgbClr val="222222"/>
+                </a:solidFill>
+                <a:latin typeface="맑은 고딕"/>
+              </a:rPr>
+              <a:t> 는 </a:t>
+            </a:r>
+            <a:r>
+              <a:rPr sz="1700" b="1">
+                <a:solidFill>
+                  <a:srgbClr val="222222"/>
+                </a:solidFill>
+                <a:latin typeface="맑은 고딕"/>
+              </a:rPr>
+              <a:t>비어 있는 것이 정상</a:t>
             </a:r>
           </a:p>
         </p:txBody>
@@ -15997,7 +20548,35 @@
                 </a:solidFill>
                 <a:latin typeface="맑은 고딕"/>
               </a:rPr>
-              <a:t>•  `SEQUENCE#` 가 **전부 0**</a:t>
+              <a:t>•  </a:t>
+            </a:r>
+            <a:r>
+              <a:rPr sz="1700" b="0">
+                <a:solidFill>
+                  <a:srgbClr val="222222"/>
+                </a:solidFill>
+                <a:latin typeface="Consolas"/>
+                <a:cs typeface="Consolas"/>
+              </a:rPr>
+              <a:t>SEQUENCE#</a:t>
+            </a:r>
+            <a:r>
+              <a:rPr sz="1700" b="0">
+                <a:solidFill>
+                  <a:srgbClr val="222222"/>
+                </a:solidFill>
+                <a:latin typeface="맑은 고딕"/>
+              </a:rPr>
+              <a:t> 가 </a:t>
+            </a:r>
+            <a:r>
+              <a:rPr sz="1700" b="1">
+                <a:solidFill>
+                  <a:srgbClr val="222222"/>
+                </a:solidFill>
+                <a:latin typeface="맑은 고딕"/>
+              </a:rPr>
+              <a:t>전부 0</a:t>
             </a:r>
           </a:p>
           <a:p>
@@ -16029,7 +20608,16 @@
                 </a:solidFill>
                 <a:latin typeface="맑은 고딕"/>
               </a:rPr>
-              <a:t>•  그러면 왜 있는가 — **역할이 바뀐 뒤에 쓰려고**</a:t>
+              <a:t>•  그러면 왜 있는가 — </a:t>
+            </a:r>
+            <a:r>
+              <a:rPr sz="1700" b="1">
+                <a:solidFill>
+                  <a:srgbClr val="222222"/>
+                </a:solidFill>
+                <a:latin typeface="맑은 고딕"/>
+              </a:rPr>
+              <a:t>역할이 바뀐 뒤에 쓰려고</a:t>
             </a:r>
           </a:p>
           <a:p>
@@ -16045,7 +20633,45 @@
                 </a:solidFill>
                 <a:latin typeface="맑은 고딕"/>
               </a:rPr>
-              <a:t>•  14장 `VERBOSE` 의 `Future` 구성이 계산한 대상</a:t>
+              <a:t>•  14장 </a:t>
+            </a:r>
+            <a:r>
+              <a:rPr sz="1700" b="0">
+                <a:solidFill>
+                  <a:srgbClr val="222222"/>
+                </a:solidFill>
+                <a:latin typeface="Consolas"/>
+                <a:cs typeface="Consolas"/>
+              </a:rPr>
+              <a:t>VERBOSE</a:t>
+            </a:r>
+            <a:r>
+              <a:rPr sz="1700" b="0">
+                <a:solidFill>
+                  <a:srgbClr val="222222"/>
+                </a:solidFill>
+                <a:latin typeface="맑은 고딕"/>
+              </a:rPr>
+              <a:t> 의 </a:t>
+            </a:r>
+            <a:r>
+              <a:rPr sz="1700" b="0">
+                <a:solidFill>
+                  <a:srgbClr val="222222"/>
+                </a:solidFill>
+                <a:latin typeface="Consolas"/>
+                <a:cs typeface="Consolas"/>
+              </a:rPr>
+              <a:t>Future</a:t>
+            </a:r>
+            <a:r>
+              <a:rPr sz="1700" b="0">
+                <a:solidFill>
+                  <a:srgbClr val="222222"/>
+                </a:solidFill>
+                <a:latin typeface="맑은 고딕"/>
+              </a:rPr>
+              <a:t> 구성이 계산한 대상</a:t>
             </a:r>
           </a:p>
         </p:txBody>
